--- a/docs/GDP_앙상블_스토리_세예측가_2026-07-29.pptx
+++ b/docs/GDP_앙상블_스토리_세예측가_2026-07-29.pptx
@@ -5,13 +5,13 @@
     <p:sldMasterId id="2147483648" r:id="rId1"/>
   </p:sldMasterIdLst>
   <p:sldIdLst>
-    <p:sldId id="256" r:id="rId7"/>
-    <p:sldId id="257" r:id="rId8"/>
-    <p:sldId id="258" r:id="rId9"/>
-    <p:sldId id="259" r:id="rId10"/>
-    <p:sldId id="260" r:id="rId11"/>
+    <p:sldId id="256" r:id="rId2"/>
+    <p:sldId id="257" r:id="rId3"/>
+    <p:sldId id="258" r:id="rId4"/>
+    <p:sldId id="259" r:id="rId5"/>
+    <p:sldId id="260" r:id="rId6"/>
   </p:sldIdLst>
-  <p:sldSz cx="12191695" cy="6858000" type="screen4x3"/>
+  <p:sldSz cx="12192000" cy="6858000"/>
   <p:notesSz cx="6858000" cy="9144000"/>
   <p:defaultTextStyle>
     <a:defPPr>
@@ -108,6 +108,22 @@
       </a:defRPr>
     </a:lvl9pPr>
   </p:defaultTextStyle>
+  <p:extLst>
+    <p:ext uri="{EFAFB233-063F-42B5-8137-9DF3F51BA10A}">
+      <p15:sldGuideLst xmlns:p15="http://schemas.microsoft.com/office/powerpoint/2012/main">
+        <p15:guide id="1" orient="horz" pos="2160">
+          <p15:clr>
+            <a:srgbClr val="A4A3A4"/>
+          </p15:clr>
+        </p15:guide>
+        <p15:guide id="2" pos="2880">
+          <p15:clr>
+            <a:srgbClr val="A4A3A4"/>
+          </p15:clr>
+        </p15:guide>
+      </p15:sldGuideLst>
+    </p:ext>
+  </p:extLst>
 </p:presentation>
 </file>
 
@@ -149,10 +165,9 @@
           <a:lstStyle/>
           <a:p>
             <a:r>
-              <a:rPr lang="en-US" smtClean="0"/>
+              <a:rPr lang="en-US"/>
               <a:t>Click to edit Master title style</a:t>
             </a:r>
-            <a:endParaRPr lang="en-US"/>
           </a:p>
         </p:txBody>
       </p:sp>
@@ -268,10 +283,9 @@
           </a:lstStyle>
           <a:p>
             <a:r>
-              <a:rPr lang="en-US" smtClean="0"/>
+              <a:rPr lang="en-US"/>
               <a:t>Click to edit Master subtitle style</a:t>
             </a:r>
-            <a:endParaRPr lang="en-US"/>
           </a:p>
         </p:txBody>
       </p:sp>
@@ -292,7 +306,7 @@
           <a:p>
             <a:fld id="{5BCAD085-E8A6-8845-BD4E-CB4CCA059FC4}" type="datetimeFigureOut">
               <a:rPr lang="en-US" smtClean="0"/>
-              <a:t>1/27/13</a:t>
+              <a:t>7/29/26</a:t>
             </a:fld>
             <a:endParaRPr lang="en-US"/>
           </a:p>
@@ -386,10 +400,9 @@
           <a:lstStyle/>
           <a:p>
             <a:r>
-              <a:rPr lang="en-US" smtClean="0"/>
+              <a:rPr lang="en-US"/>
               <a:t>Click to edit Master title style</a:t>
             </a:r>
-            <a:endParaRPr lang="en-US"/>
           </a:p>
         </p:txBody>
       </p:sp>
@@ -410,38 +423,37 @@
           <a:p>
             <a:pPr lvl="0"/>
             <a:r>
-              <a:rPr lang="en-US" smtClean="0"/>
+              <a:rPr lang="en-US"/>
               <a:t>Click to edit Master text styles</a:t>
             </a:r>
           </a:p>
           <a:p>
             <a:pPr lvl="1"/>
             <a:r>
-              <a:rPr lang="en-US" smtClean="0"/>
+              <a:rPr lang="en-US"/>
               <a:t>Second level</a:t>
             </a:r>
           </a:p>
           <a:p>
             <a:pPr lvl="2"/>
             <a:r>
-              <a:rPr lang="en-US" smtClean="0"/>
+              <a:rPr lang="en-US"/>
               <a:t>Third level</a:t>
             </a:r>
           </a:p>
           <a:p>
             <a:pPr lvl="3"/>
             <a:r>
-              <a:rPr lang="en-US" smtClean="0"/>
+              <a:rPr lang="en-US"/>
               <a:t>Fourth level</a:t>
             </a:r>
           </a:p>
           <a:p>
             <a:pPr lvl="4"/>
             <a:r>
-              <a:rPr lang="en-US" smtClean="0"/>
+              <a:rPr lang="en-US"/>
               <a:t>Fifth level</a:t>
             </a:r>
-            <a:endParaRPr lang="en-US"/>
           </a:p>
         </p:txBody>
       </p:sp>
@@ -462,7 +474,7 @@
           <a:p>
             <a:fld id="{5BCAD085-E8A6-8845-BD4E-CB4CCA059FC4}" type="datetimeFigureOut">
               <a:rPr lang="en-US" smtClean="0"/>
-              <a:t>1/27/13</a:t>
+              <a:t>7/29/26</a:t>
             </a:fld>
             <a:endParaRPr lang="en-US"/>
           </a:p>
@@ -561,10 +573,9 @@
           <a:lstStyle/>
           <a:p>
             <a:r>
-              <a:rPr lang="en-US" smtClean="0"/>
+              <a:rPr lang="en-US"/>
               <a:t>Click to edit Master title style</a:t>
             </a:r>
-            <a:endParaRPr lang="en-US"/>
           </a:p>
         </p:txBody>
       </p:sp>
@@ -590,38 +601,37 @@
           <a:p>
             <a:pPr lvl="0"/>
             <a:r>
-              <a:rPr lang="en-US" smtClean="0"/>
+              <a:rPr lang="en-US"/>
               <a:t>Click to edit Master text styles</a:t>
             </a:r>
           </a:p>
           <a:p>
             <a:pPr lvl="1"/>
             <a:r>
-              <a:rPr lang="en-US" smtClean="0"/>
+              <a:rPr lang="en-US"/>
               <a:t>Second level</a:t>
             </a:r>
           </a:p>
           <a:p>
             <a:pPr lvl="2"/>
             <a:r>
-              <a:rPr lang="en-US" smtClean="0"/>
+              <a:rPr lang="en-US"/>
               <a:t>Third level</a:t>
             </a:r>
           </a:p>
           <a:p>
             <a:pPr lvl="3"/>
             <a:r>
-              <a:rPr lang="en-US" smtClean="0"/>
+              <a:rPr lang="en-US"/>
               <a:t>Fourth level</a:t>
             </a:r>
           </a:p>
           <a:p>
             <a:pPr lvl="4"/>
             <a:r>
-              <a:rPr lang="en-US" smtClean="0"/>
+              <a:rPr lang="en-US"/>
               <a:t>Fifth level</a:t>
             </a:r>
-            <a:endParaRPr lang="en-US"/>
           </a:p>
         </p:txBody>
       </p:sp>
@@ -642,7 +652,7 @@
           <a:p>
             <a:fld id="{5BCAD085-E8A6-8845-BD4E-CB4CCA059FC4}" type="datetimeFigureOut">
               <a:rPr lang="en-US" smtClean="0"/>
-              <a:t>1/27/13</a:t>
+              <a:t>7/29/26</a:t>
             </a:fld>
             <a:endParaRPr lang="en-US"/>
           </a:p>
@@ -736,10 +746,9 @@
           <a:lstStyle/>
           <a:p>
             <a:r>
-              <a:rPr lang="en-US" smtClean="0"/>
+              <a:rPr lang="en-US"/>
               <a:t>Click to edit Master title style</a:t>
             </a:r>
-            <a:endParaRPr lang="en-US"/>
           </a:p>
         </p:txBody>
       </p:sp>
@@ -760,38 +769,37 @@
           <a:p>
             <a:pPr lvl="0"/>
             <a:r>
-              <a:rPr lang="en-US" smtClean="0"/>
+              <a:rPr lang="en-US"/>
               <a:t>Click to edit Master text styles</a:t>
             </a:r>
           </a:p>
           <a:p>
             <a:pPr lvl="1"/>
             <a:r>
-              <a:rPr lang="en-US" smtClean="0"/>
+              <a:rPr lang="en-US"/>
               <a:t>Second level</a:t>
             </a:r>
           </a:p>
           <a:p>
             <a:pPr lvl="2"/>
             <a:r>
-              <a:rPr lang="en-US" smtClean="0"/>
+              <a:rPr lang="en-US"/>
               <a:t>Third level</a:t>
             </a:r>
           </a:p>
           <a:p>
             <a:pPr lvl="3"/>
             <a:r>
-              <a:rPr lang="en-US" smtClean="0"/>
+              <a:rPr lang="en-US"/>
               <a:t>Fourth level</a:t>
             </a:r>
           </a:p>
           <a:p>
             <a:pPr lvl="4"/>
             <a:r>
-              <a:rPr lang="en-US" smtClean="0"/>
+              <a:rPr lang="en-US"/>
               <a:t>Fifth level</a:t>
             </a:r>
-            <a:endParaRPr lang="en-US"/>
           </a:p>
         </p:txBody>
       </p:sp>
@@ -812,7 +820,7 @@
           <a:p>
             <a:fld id="{5BCAD085-E8A6-8845-BD4E-CB4CCA059FC4}" type="datetimeFigureOut">
               <a:rPr lang="en-US" smtClean="0"/>
-              <a:t>1/27/13</a:t>
+              <a:t>7/29/26</a:t>
             </a:fld>
             <a:endParaRPr lang="en-US"/>
           </a:p>
@@ -915,10 +923,9 @@
           </a:lstStyle>
           <a:p>
             <a:r>
-              <a:rPr lang="en-US" smtClean="0"/>
+              <a:rPr lang="en-US"/>
               <a:t>Click to edit Master title style</a:t>
             </a:r>
-            <a:endParaRPr lang="en-US"/>
           </a:p>
         </p:txBody>
       </p:sp>
@@ -1035,7 +1042,7 @@
           <a:p>
             <a:pPr lvl="0"/>
             <a:r>
-              <a:rPr lang="en-US" smtClean="0"/>
+              <a:rPr lang="en-US"/>
               <a:t>Click to edit Master text styles</a:t>
             </a:r>
           </a:p>
@@ -1058,7 +1065,7 @@
           <a:p>
             <a:fld id="{5BCAD085-E8A6-8845-BD4E-CB4CCA059FC4}" type="datetimeFigureOut">
               <a:rPr lang="en-US" smtClean="0"/>
-              <a:t>1/27/13</a:t>
+              <a:t>7/29/26</a:t>
             </a:fld>
             <a:endParaRPr lang="en-US"/>
           </a:p>
@@ -1152,10 +1159,9 @@
           <a:lstStyle/>
           <a:p>
             <a:r>
-              <a:rPr lang="en-US" smtClean="0"/>
+              <a:rPr lang="en-US"/>
               <a:t>Click to edit Master title style</a:t>
             </a:r>
-            <a:endParaRPr lang="en-US"/>
           </a:p>
         </p:txBody>
       </p:sp>
@@ -1209,38 +1215,37 @@
           <a:p>
             <a:pPr lvl="0"/>
             <a:r>
-              <a:rPr lang="en-US" smtClean="0"/>
+              <a:rPr lang="en-US"/>
               <a:t>Click to edit Master text styles</a:t>
             </a:r>
           </a:p>
           <a:p>
             <a:pPr lvl="1"/>
             <a:r>
-              <a:rPr lang="en-US" smtClean="0"/>
+              <a:rPr lang="en-US"/>
               <a:t>Second level</a:t>
             </a:r>
           </a:p>
           <a:p>
             <a:pPr lvl="2"/>
             <a:r>
-              <a:rPr lang="en-US" smtClean="0"/>
+              <a:rPr lang="en-US"/>
               <a:t>Third level</a:t>
             </a:r>
           </a:p>
           <a:p>
             <a:pPr lvl="3"/>
             <a:r>
-              <a:rPr lang="en-US" smtClean="0"/>
+              <a:rPr lang="en-US"/>
               <a:t>Fourth level</a:t>
             </a:r>
           </a:p>
           <a:p>
             <a:pPr lvl="4"/>
             <a:r>
-              <a:rPr lang="en-US" smtClean="0"/>
+              <a:rPr lang="en-US"/>
               <a:t>Fifth level</a:t>
             </a:r>
-            <a:endParaRPr lang="en-US"/>
           </a:p>
         </p:txBody>
       </p:sp>
@@ -1294,38 +1299,37 @@
           <a:p>
             <a:pPr lvl="0"/>
             <a:r>
-              <a:rPr lang="en-US" smtClean="0"/>
+              <a:rPr lang="en-US"/>
               <a:t>Click to edit Master text styles</a:t>
             </a:r>
           </a:p>
           <a:p>
             <a:pPr lvl="1"/>
             <a:r>
-              <a:rPr lang="en-US" smtClean="0"/>
+              <a:rPr lang="en-US"/>
               <a:t>Second level</a:t>
             </a:r>
           </a:p>
           <a:p>
             <a:pPr lvl="2"/>
             <a:r>
-              <a:rPr lang="en-US" smtClean="0"/>
+              <a:rPr lang="en-US"/>
               <a:t>Third level</a:t>
             </a:r>
           </a:p>
           <a:p>
             <a:pPr lvl="3"/>
             <a:r>
-              <a:rPr lang="en-US" smtClean="0"/>
+              <a:rPr lang="en-US"/>
               <a:t>Fourth level</a:t>
             </a:r>
           </a:p>
           <a:p>
             <a:pPr lvl="4"/>
             <a:r>
-              <a:rPr lang="en-US" smtClean="0"/>
+              <a:rPr lang="en-US"/>
               <a:t>Fifth level</a:t>
             </a:r>
-            <a:endParaRPr lang="en-US"/>
           </a:p>
         </p:txBody>
       </p:sp>
@@ -1346,7 +1350,7 @@
           <a:p>
             <a:fld id="{5BCAD085-E8A6-8845-BD4E-CB4CCA059FC4}" type="datetimeFigureOut">
               <a:rPr lang="en-US" smtClean="0"/>
-              <a:t>1/27/13</a:t>
+              <a:t>7/29/26</a:t>
             </a:fld>
             <a:endParaRPr lang="en-US"/>
           </a:p>
@@ -1444,10 +1448,9 @@
           </a:lstStyle>
           <a:p>
             <a:r>
-              <a:rPr lang="en-US" smtClean="0"/>
+              <a:rPr lang="en-US"/>
               <a:t>Click to edit Master title style</a:t>
             </a:r>
-            <a:endParaRPr lang="en-US"/>
           </a:p>
         </p:txBody>
       </p:sp>
@@ -1510,7 +1513,7 @@
           <a:p>
             <a:pPr lvl="0"/>
             <a:r>
-              <a:rPr lang="en-US" smtClean="0"/>
+              <a:rPr lang="en-US"/>
               <a:t>Click to edit Master text styles</a:t>
             </a:r>
           </a:p>
@@ -1566,38 +1569,37 @@
           <a:p>
             <a:pPr lvl="0"/>
             <a:r>
-              <a:rPr lang="en-US" smtClean="0"/>
+              <a:rPr lang="en-US"/>
               <a:t>Click to edit Master text styles</a:t>
             </a:r>
           </a:p>
           <a:p>
             <a:pPr lvl="1"/>
             <a:r>
-              <a:rPr lang="en-US" smtClean="0"/>
+              <a:rPr lang="en-US"/>
               <a:t>Second level</a:t>
             </a:r>
           </a:p>
           <a:p>
             <a:pPr lvl="2"/>
             <a:r>
-              <a:rPr lang="en-US" smtClean="0"/>
+              <a:rPr lang="en-US"/>
               <a:t>Third level</a:t>
             </a:r>
           </a:p>
           <a:p>
             <a:pPr lvl="3"/>
             <a:r>
-              <a:rPr lang="en-US" smtClean="0"/>
+              <a:rPr lang="en-US"/>
               <a:t>Fourth level</a:t>
             </a:r>
           </a:p>
           <a:p>
             <a:pPr lvl="4"/>
             <a:r>
-              <a:rPr lang="en-US" smtClean="0"/>
+              <a:rPr lang="en-US"/>
               <a:t>Fifth level</a:t>
             </a:r>
-            <a:endParaRPr lang="en-US"/>
           </a:p>
         </p:txBody>
       </p:sp>
@@ -1660,7 +1662,7 @@
           <a:p>
             <a:pPr lvl="0"/>
             <a:r>
-              <a:rPr lang="en-US" smtClean="0"/>
+              <a:rPr lang="en-US"/>
               <a:t>Click to edit Master text styles</a:t>
             </a:r>
           </a:p>
@@ -1716,38 +1718,37 @@
           <a:p>
             <a:pPr lvl="0"/>
             <a:r>
-              <a:rPr lang="en-US" smtClean="0"/>
+              <a:rPr lang="en-US"/>
               <a:t>Click to edit Master text styles</a:t>
             </a:r>
           </a:p>
           <a:p>
             <a:pPr lvl="1"/>
             <a:r>
-              <a:rPr lang="en-US" smtClean="0"/>
+              <a:rPr lang="en-US"/>
               <a:t>Second level</a:t>
             </a:r>
           </a:p>
           <a:p>
             <a:pPr lvl="2"/>
             <a:r>
-              <a:rPr lang="en-US" smtClean="0"/>
+              <a:rPr lang="en-US"/>
               <a:t>Third level</a:t>
             </a:r>
           </a:p>
           <a:p>
             <a:pPr lvl="3"/>
             <a:r>
-              <a:rPr lang="en-US" smtClean="0"/>
+              <a:rPr lang="en-US"/>
               <a:t>Fourth level</a:t>
             </a:r>
           </a:p>
           <a:p>
             <a:pPr lvl="4"/>
             <a:r>
-              <a:rPr lang="en-US" smtClean="0"/>
+              <a:rPr lang="en-US"/>
               <a:t>Fifth level</a:t>
             </a:r>
-            <a:endParaRPr lang="en-US"/>
           </a:p>
         </p:txBody>
       </p:sp>
@@ -1768,7 +1769,7 @@
           <a:p>
             <a:fld id="{5BCAD085-E8A6-8845-BD4E-CB4CCA059FC4}" type="datetimeFigureOut">
               <a:rPr lang="en-US" smtClean="0"/>
-              <a:t>1/27/13</a:t>
+              <a:t>7/29/26</a:t>
             </a:fld>
             <a:endParaRPr lang="en-US"/>
           </a:p>
@@ -1862,10 +1863,9 @@
           <a:lstStyle/>
           <a:p>
             <a:r>
-              <a:rPr lang="en-US" smtClean="0"/>
+              <a:rPr lang="en-US"/>
               <a:t>Click to edit Master title style</a:t>
             </a:r>
-            <a:endParaRPr lang="en-US"/>
           </a:p>
         </p:txBody>
       </p:sp>
@@ -1886,7 +1886,7 @@
           <a:p>
             <a:fld id="{5BCAD085-E8A6-8845-BD4E-CB4CCA059FC4}" type="datetimeFigureOut">
               <a:rPr lang="en-US" smtClean="0"/>
-              <a:t>1/27/13</a:t>
+              <a:t>7/29/26</a:t>
             </a:fld>
             <a:endParaRPr lang="en-US"/>
           </a:p>
@@ -1981,7 +1981,7 @@
           <a:p>
             <a:fld id="{5BCAD085-E8A6-8845-BD4E-CB4CCA059FC4}" type="datetimeFigureOut">
               <a:rPr lang="en-US" smtClean="0"/>
-              <a:t>1/27/13</a:t>
+              <a:t>7/29/26</a:t>
             </a:fld>
             <a:endParaRPr lang="en-US"/>
           </a:p>
@@ -2084,10 +2084,9 @@
           </a:lstStyle>
           <a:p>
             <a:r>
-              <a:rPr lang="en-US" smtClean="0"/>
+              <a:rPr lang="en-US"/>
               <a:t>Click to edit Master title style</a:t>
             </a:r>
-            <a:endParaRPr lang="en-US"/>
           </a:p>
         </p:txBody>
       </p:sp>
@@ -2141,38 +2140,37 @@
           <a:p>
             <a:pPr lvl="0"/>
             <a:r>
-              <a:rPr lang="en-US" smtClean="0"/>
+              <a:rPr lang="en-US"/>
               <a:t>Click to edit Master text styles</a:t>
             </a:r>
           </a:p>
           <a:p>
             <a:pPr lvl="1"/>
             <a:r>
-              <a:rPr lang="en-US" smtClean="0"/>
+              <a:rPr lang="en-US"/>
               <a:t>Second level</a:t>
             </a:r>
           </a:p>
           <a:p>
             <a:pPr lvl="2"/>
             <a:r>
-              <a:rPr lang="en-US" smtClean="0"/>
+              <a:rPr lang="en-US"/>
               <a:t>Third level</a:t>
             </a:r>
           </a:p>
           <a:p>
             <a:pPr lvl="3"/>
             <a:r>
-              <a:rPr lang="en-US" smtClean="0"/>
+              <a:rPr lang="en-US"/>
               <a:t>Fourth level</a:t>
             </a:r>
           </a:p>
           <a:p>
             <a:pPr lvl="4"/>
             <a:r>
-              <a:rPr lang="en-US" smtClean="0"/>
+              <a:rPr lang="en-US"/>
               <a:t>Fifth level</a:t>
             </a:r>
-            <a:endParaRPr lang="en-US"/>
           </a:p>
         </p:txBody>
       </p:sp>
@@ -2235,7 +2233,7 @@
           <a:p>
             <a:pPr lvl="0"/>
             <a:r>
-              <a:rPr lang="en-US" smtClean="0"/>
+              <a:rPr lang="en-US"/>
               <a:t>Click to edit Master text styles</a:t>
             </a:r>
           </a:p>
@@ -2258,7 +2256,7 @@
           <a:p>
             <a:fld id="{5BCAD085-E8A6-8845-BD4E-CB4CCA059FC4}" type="datetimeFigureOut">
               <a:rPr lang="en-US" smtClean="0"/>
-              <a:t>1/27/13</a:t>
+              <a:t>7/29/26</a:t>
             </a:fld>
             <a:endParaRPr lang="en-US"/>
           </a:p>
@@ -2361,10 +2359,9 @@
           </a:lstStyle>
           <a:p>
             <a:r>
-              <a:rPr lang="en-US" smtClean="0"/>
+              <a:rPr lang="en-US"/>
               <a:t>Click to edit Master title style</a:t>
             </a:r>
-            <a:endParaRPr lang="en-US"/>
           </a:p>
         </p:txBody>
       </p:sp>
@@ -2488,7 +2485,7 @@
           <a:p>
             <a:pPr lvl="0"/>
             <a:r>
-              <a:rPr lang="en-US" smtClean="0"/>
+              <a:rPr lang="en-US"/>
               <a:t>Click to edit Master text styles</a:t>
             </a:r>
           </a:p>
@@ -2511,7 +2508,7 @@
           <a:p>
             <a:fld id="{5BCAD085-E8A6-8845-BD4E-CB4CCA059FC4}" type="datetimeFigureOut">
               <a:rPr lang="en-US" smtClean="0"/>
-              <a:t>1/27/13</a:t>
+              <a:t>7/29/26</a:t>
             </a:fld>
             <a:endParaRPr lang="en-US"/>
           </a:p>
@@ -2620,10 +2617,9 @@
           <a:lstStyle/>
           <a:p>
             <a:r>
-              <a:rPr lang="en-US" smtClean="0"/>
+              <a:rPr lang="en-US"/>
               <a:t>Click to edit Master title style</a:t>
             </a:r>
-            <a:endParaRPr lang="en-US"/>
           </a:p>
         </p:txBody>
       </p:sp>
@@ -2654,38 +2650,37 @@
           <a:p>
             <a:pPr lvl="0"/>
             <a:r>
-              <a:rPr lang="en-US" smtClean="0"/>
+              <a:rPr lang="en-US"/>
               <a:t>Click to edit Master text styles</a:t>
             </a:r>
           </a:p>
           <a:p>
             <a:pPr lvl="1"/>
             <a:r>
-              <a:rPr lang="en-US" smtClean="0"/>
+              <a:rPr lang="en-US"/>
               <a:t>Second level</a:t>
             </a:r>
           </a:p>
           <a:p>
             <a:pPr lvl="2"/>
             <a:r>
-              <a:rPr lang="en-US" smtClean="0"/>
+              <a:rPr lang="en-US"/>
               <a:t>Third level</a:t>
             </a:r>
           </a:p>
           <a:p>
             <a:pPr lvl="3"/>
             <a:r>
-              <a:rPr lang="en-US" smtClean="0"/>
+              <a:rPr lang="en-US"/>
               <a:t>Fourth level</a:t>
             </a:r>
           </a:p>
           <a:p>
             <a:pPr lvl="4"/>
             <a:r>
-              <a:rPr lang="en-US" smtClean="0"/>
+              <a:rPr lang="en-US"/>
               <a:t>Fifth level</a:t>
             </a:r>
-            <a:endParaRPr lang="en-US"/>
           </a:p>
         </p:txBody>
       </p:sp>
@@ -2724,7 +2719,7 @@
           <a:p>
             <a:fld id="{5BCAD085-E8A6-8845-BD4E-CB4CCA059FC4}" type="datetimeFigureOut">
               <a:rPr lang="en-US" smtClean="0"/>
-              <a:t>1/27/13</a:t>
+              <a:t>7/29/26</a:t>
             </a:fld>
             <a:endParaRPr lang="en-US"/>
           </a:p>
@@ -3083,7 +3078,7 @@
 </file>
 
 <file path=ppt/slides/slide1.xml><?xml version="1.0" encoding="utf-8"?>
-<p:sld xmlns:a="http://schemas.openxmlformats.org/drawingml/2006/main" xmlns:p="http://schemas.openxmlformats.org/presentationml/2006/main" xmlns:r="http://schemas.openxmlformats.org/officeDocument/2006/relationships">
+<p:sld xmlns:a="http://schemas.openxmlformats.org/drawingml/2006/main" xmlns:r="http://schemas.openxmlformats.org/officeDocument/2006/relationships" xmlns:p="http://schemas.openxmlformats.org/presentationml/2006/main">
   <p:cSld>
     <p:spTree>
       <p:nvGrpSpPr>
@@ -3091,7 +3086,14 @@
         <p:cNvGrpSpPr/>
         <p:nvPr/>
       </p:nvGrpSpPr>
-      <p:grpSpPr/>
+      <p:grpSpPr>
+        <a:xfrm>
+          <a:off x="0" y="0"/>
+          <a:ext cx="0" cy="0"/>
+          <a:chOff x="0" y="0"/>
+          <a:chExt cx="0" cy="0"/>
+        </a:xfrm>
+      </p:grpSpPr>
       <p:sp>
         <p:nvSpPr>
           <p:cNvPr id="2" name="Rectangle 1"/>
@@ -3133,6 +3135,10 @@
           <a:lstStyle/>
           <a:p>
             <a:pPr algn="ctr"/>
+            <a:endParaRPr>
+              <a:latin typeface="NanumSquare Neo Regular" pitchFamily="2" charset="-127"/>
+              <a:ea typeface="NanumSquare Neo Regular" pitchFamily="2" charset="-127"/>
+            </a:endParaRPr>
           </a:p>
         </p:txBody>
       </p:sp>
@@ -3145,7 +3151,7 @@
         <p:spPr>
           <a:xfrm>
             <a:off x="731520" y="1874519"/>
-            <a:ext cx="10698480" cy="822960"/>
+            <a:ext cx="10698480" cy="652486"/>
           </a:xfrm>
           <a:prstGeom prst="rect">
             <a:avLst/>
@@ -3153,7 +3159,7 @@
           <a:noFill/>
         </p:spPr>
         <p:txBody>
-          <a:bodyPr wrap="square" anchor="t" lIns="45720" rIns="45720" tIns="18288" bIns="18288">
+          <a:bodyPr wrap="square" lIns="45720" tIns="18288" rIns="45720" bIns="18288" anchor="t">
             <a:spAutoFit/>
           </a:bodyPr>
           <a:lstStyle/>
@@ -3168,8 +3174,8 @@
                 <a:solidFill>
                   <a:srgbClr val="262626"/>
                 </a:solidFill>
-                <a:latin typeface="Apple SD Gothic Neo"/>
-                <a:ea typeface="Apple SD Gothic Neo"/>
+                <a:latin typeface="NanumSquare Neo Regular" pitchFamily="2" charset="-127"/>
+                <a:ea typeface="NanumSquare Neo Regular" pitchFamily="2" charset="-127"/>
               </a:rPr>
               <a:t>🏛️   🔧   🛰️</a:t>
             </a:r>
@@ -3185,7 +3191,7 @@
         <p:spPr>
           <a:xfrm>
             <a:off x="731520" y="2743200"/>
-            <a:ext cx="10698480" cy="822960"/>
+            <a:ext cx="10698480" cy="652486"/>
           </a:xfrm>
           <a:prstGeom prst="rect">
             <a:avLst/>
@@ -3193,7 +3199,7 @@
           <a:noFill/>
         </p:spPr>
         <p:txBody>
-          <a:bodyPr wrap="square" anchor="t" lIns="45720" rIns="45720" tIns="18288" bIns="18288">
+          <a:bodyPr wrap="square" lIns="45720" tIns="18288" rIns="45720" bIns="18288" anchor="t">
             <a:spAutoFit/>
           </a:bodyPr>
           <a:lstStyle/>
@@ -3208,8 +3214,8 @@
                 <a:solidFill>
                   <a:srgbClr val="243447"/>
                 </a:solidFill>
-                <a:latin typeface="Apple SD Gothic Neo"/>
-                <a:ea typeface="Apple SD Gothic Neo"/>
+                <a:latin typeface="NanumSquare Neo Regular" pitchFamily="2" charset="-127"/>
+                <a:ea typeface="NanumSquare Neo Regular" pitchFamily="2" charset="-127"/>
               </a:rPr>
               <a:t>세 명의 예측가 이야기</a:t>
             </a:r>
@@ -3225,7 +3231,7 @@
         <p:spPr>
           <a:xfrm>
             <a:off x="731520" y="3611880"/>
-            <a:ext cx="10698480" cy="457200"/>
+            <a:ext cx="10698480" cy="283154"/>
           </a:xfrm>
           <a:prstGeom prst="rect">
             <a:avLst/>
@@ -3233,7 +3239,7 @@
           <a:noFill/>
         </p:spPr>
         <p:txBody>
-          <a:bodyPr wrap="square" anchor="t" lIns="45720" rIns="45720" tIns="18288" bIns="18288">
+          <a:bodyPr wrap="square" lIns="45720" tIns="18288" rIns="45720" bIns="18288" anchor="t">
             <a:spAutoFit/>
           </a:bodyPr>
           <a:lstStyle/>
@@ -3248,8 +3254,8 @@
                 <a:solidFill>
                   <a:srgbClr val="6B6B6B"/>
                 </a:solidFill>
-                <a:latin typeface="Apple SD Gothic Neo"/>
-                <a:ea typeface="Apple SD Gothic Neo"/>
+                <a:latin typeface="NanumSquare Neo Regular" pitchFamily="2" charset="-127"/>
+                <a:ea typeface="NanumSquare Neo Regular" pitchFamily="2" charset="-127"/>
               </a:rPr>
               <a:t>— GDP 나우캐스트가 국면 판단 없이 신기록을 낸 비결 —</a:t>
             </a:r>
@@ -3265,7 +3271,7 @@
         <p:spPr>
           <a:xfrm>
             <a:off x="731520" y="4343400"/>
-            <a:ext cx="10698480" cy="457200"/>
+            <a:ext cx="10698480" cy="236988"/>
           </a:xfrm>
           <a:prstGeom prst="rect">
             <a:avLst/>
@@ -3273,7 +3279,7 @@
           <a:noFill/>
         </p:spPr>
         <p:txBody>
-          <a:bodyPr wrap="square" anchor="t" lIns="45720" rIns="45720" tIns="18288" bIns="18288">
+          <a:bodyPr wrap="square" lIns="45720" tIns="18288" rIns="45720" bIns="18288" anchor="t">
             <a:spAutoFit/>
           </a:bodyPr>
           <a:lstStyle/>
@@ -3288,8 +3294,8 @@
                 <a:solidFill>
                   <a:srgbClr val="262626"/>
                 </a:solidFill>
-                <a:latin typeface="Apple SD Gothic Neo"/>
-                <a:ea typeface="Apple SD Gothic Neo"/>
+                <a:latin typeface="NanumSquare Neo Regular" pitchFamily="2" charset="-127"/>
+                <a:ea typeface="NanumSquare Neo Regular" pitchFamily="2" charset="-127"/>
               </a:rPr>
               <a:t>원로 이코노미스트, 꼼꼼한 조수, 그리고 시세판을 보는 컨설턴트</a:t>
             </a:r>
@@ -3340,7 +3346,7 @@
         <p:spPr>
           <a:xfrm>
             <a:off x="731520" y="5212080"/>
-            <a:ext cx="10698480" cy="365760"/>
+            <a:ext cx="10698480" cy="206210"/>
           </a:xfrm>
           <a:prstGeom prst="rect">
             <a:avLst/>
@@ -3348,7 +3354,7 @@
           <a:noFill/>
         </p:spPr>
         <p:txBody>
-          <a:bodyPr wrap="square" anchor="t" lIns="45720" rIns="45720" tIns="18288" bIns="18288">
+          <a:bodyPr wrap="square" lIns="45720" tIns="18288" rIns="45720" bIns="18288" anchor="t">
             <a:spAutoFit/>
           </a:bodyPr>
           <a:lstStyle/>
@@ -3363,8 +3369,8 @@
                 <a:solidFill>
                   <a:srgbClr val="6B6B6B"/>
                 </a:solidFill>
-                <a:latin typeface="Apple SD Gothic Neo"/>
-                <a:ea typeface="Apple SD Gothic Neo"/>
+                <a:latin typeface="NanumSquare Neo Regular" pitchFamily="2" charset="-127"/>
+                <a:ea typeface="NanumSquare Neo Regular" pitchFamily="2" charset="-127"/>
               </a:rPr>
               <a:t>AX Lab · 2026. 07  |  한국은행 GDP Nowcasting 협업</a:t>
             </a:r>
@@ -3380,7 +3386,7 @@
 </file>
 
 <file path=ppt/slides/slide2.xml><?xml version="1.0" encoding="utf-8"?>
-<p:sld xmlns:a="http://schemas.openxmlformats.org/drawingml/2006/main" xmlns:p="http://schemas.openxmlformats.org/presentationml/2006/main" xmlns:r="http://schemas.openxmlformats.org/officeDocument/2006/relationships">
+<p:sld xmlns:a="http://schemas.openxmlformats.org/drawingml/2006/main" xmlns:r="http://schemas.openxmlformats.org/officeDocument/2006/relationships" xmlns:p="http://schemas.openxmlformats.org/presentationml/2006/main">
   <p:cSld>
     <p:spTree>
       <p:nvGrpSpPr>
@@ -3388,7 +3394,14 @@
         <p:cNvGrpSpPr/>
         <p:nvPr/>
       </p:nvGrpSpPr>
-      <p:grpSpPr/>
+      <p:grpSpPr>
+        <a:xfrm>
+          <a:off x="0" y="0"/>
+          <a:ext cx="0" cy="0"/>
+          <a:chOff x="0" y="0"/>
+          <a:chExt cx="0" cy="0"/>
+        </a:xfrm>
+      </p:grpSpPr>
       <p:sp>
         <p:nvSpPr>
           <p:cNvPr id="2" name="TextBox 1"/>
@@ -3398,7 +3411,7 @@
         <p:spPr>
           <a:xfrm>
             <a:off x="502920" y="274320"/>
-            <a:ext cx="11155680" cy="502920"/>
+            <a:ext cx="11155680" cy="344710"/>
           </a:xfrm>
           <a:prstGeom prst="rect">
             <a:avLst/>
@@ -3406,7 +3419,7 @@
           <a:noFill/>
         </p:spPr>
         <p:txBody>
-          <a:bodyPr wrap="square" anchor="t" lIns="45720" rIns="45720" tIns="18288" bIns="18288">
+          <a:bodyPr wrap="square" lIns="45720" tIns="18288" rIns="45720" bIns="18288" anchor="t">
             <a:spAutoFit/>
           </a:bodyPr>
           <a:lstStyle/>
@@ -3421,8 +3434,8 @@
                 <a:solidFill>
                   <a:srgbClr val="008A3E"/>
                 </a:solidFill>
-                <a:latin typeface="Apple SD Gothic Neo"/>
-                <a:ea typeface="Apple SD Gothic Neo"/>
+                <a:latin typeface="NanumSquare Neo Regular" pitchFamily="2" charset="-127"/>
+                <a:ea typeface="NanumSquare Neo Regular" pitchFamily="2" charset="-127"/>
               </a:rPr>
               <a:t>01  </a:t>
             </a:r>
@@ -3431,8 +3444,8 @@
                 <a:solidFill>
                   <a:srgbClr val="243447"/>
                 </a:solidFill>
-                <a:latin typeface="Apple SD Gothic Neo"/>
-                <a:ea typeface="Apple SD Gothic Neo"/>
+                <a:latin typeface="NanumSquare Neo Regular" pitchFamily="2" charset="-127"/>
+                <a:ea typeface="NanumSquare Neo Regular" pitchFamily="2" charset="-127"/>
               </a:rPr>
               <a:t>등장인물 — 같은 문제를 푸는 세 개의 다른 눈</a:t>
             </a:r>
@@ -3517,6 +3530,10 @@
           <a:lstStyle/>
           <a:p>
             <a:pPr algn="ctr"/>
+            <a:endParaRPr>
+              <a:latin typeface="NanumSquare Neo Regular" pitchFamily="2" charset="-127"/>
+              <a:ea typeface="NanumSquare Neo Regular" pitchFamily="2" charset="-127"/>
+            </a:endParaRPr>
           </a:p>
         </p:txBody>
       </p:sp>
@@ -3529,7 +3546,7 @@
         <p:spPr>
           <a:xfrm>
             <a:off x="731520" y="1463040"/>
-            <a:ext cx="3200400" cy="640080"/>
+            <a:ext cx="3200400" cy="498598"/>
           </a:xfrm>
           <a:prstGeom prst="rect">
             <a:avLst/>
@@ -3537,7 +3554,7 @@
           <a:noFill/>
         </p:spPr>
         <p:txBody>
-          <a:bodyPr wrap="square" anchor="t" lIns="45720" rIns="45720" tIns="18288" bIns="18288">
+          <a:bodyPr wrap="square" lIns="45720" tIns="18288" rIns="45720" bIns="18288" anchor="t">
             <a:spAutoFit/>
           </a:bodyPr>
           <a:lstStyle/>
@@ -3552,8 +3569,8 @@
                 <a:solidFill>
                   <a:srgbClr val="262626"/>
                 </a:solidFill>
-                <a:latin typeface="Apple SD Gothic Neo"/>
-                <a:ea typeface="Apple SD Gothic Neo"/>
+                <a:latin typeface="NanumSquare Neo Regular" pitchFamily="2" charset="-127"/>
+                <a:ea typeface="NanumSquare Neo Regular" pitchFamily="2" charset="-127"/>
               </a:rPr>
               <a:t>🏛️</a:t>
             </a:r>
@@ -3569,7 +3586,7 @@
         <p:spPr>
           <a:xfrm>
             <a:off x="731520" y="2148840"/>
-            <a:ext cx="3200400" cy="365760"/>
+            <a:ext cx="3200400" cy="252377"/>
           </a:xfrm>
           <a:prstGeom prst="rect">
             <a:avLst/>
@@ -3577,7 +3594,7 @@
           <a:noFill/>
         </p:spPr>
         <p:txBody>
-          <a:bodyPr wrap="square" anchor="t" lIns="45720" rIns="45720" tIns="18288" bIns="18288">
+          <a:bodyPr wrap="square" lIns="45720" tIns="18288" rIns="45720" bIns="18288" anchor="t">
             <a:spAutoFit/>
           </a:bodyPr>
           <a:lstStyle/>
@@ -3592,8 +3609,8 @@
                 <a:solidFill>
                   <a:srgbClr val="243447"/>
                 </a:solidFill>
-                <a:latin typeface="Apple SD Gothic Neo"/>
-                <a:ea typeface="Apple SD Gothic Neo"/>
+                <a:latin typeface="NanumSquare Neo Regular" pitchFamily="2" charset="-127"/>
+                <a:ea typeface="NanumSquare Neo Regular" pitchFamily="2" charset="-127"/>
               </a:rPr>
               <a:t>원로 이코노미스트</a:t>
             </a:r>
@@ -3609,7 +3626,7 @@
         <p:spPr>
           <a:xfrm>
             <a:off x="731520" y="2487168"/>
-            <a:ext cx="3200400" cy="320040"/>
+            <a:ext cx="3200400" cy="198516"/>
           </a:xfrm>
           <a:prstGeom prst="rect">
             <a:avLst/>
@@ -3617,7 +3634,7 @@
           <a:noFill/>
         </p:spPr>
         <p:txBody>
-          <a:bodyPr wrap="square" anchor="t" lIns="45720" rIns="45720" tIns="18288" bIns="18288">
+          <a:bodyPr wrap="square" lIns="45720" tIns="18288" rIns="45720" bIns="18288" anchor="t">
             <a:spAutoFit/>
           </a:bodyPr>
           <a:lstStyle/>
@@ -3632,8 +3649,8 @@
                 <a:solidFill>
                   <a:srgbClr val="6B6B6B"/>
                 </a:solidFill>
-                <a:latin typeface="Apple SD Gothic Neo"/>
-                <a:ea typeface="Apple SD Gothic Neo"/>
+                <a:latin typeface="NanumSquare Neo Regular" pitchFamily="2" charset="-127"/>
+                <a:ea typeface="NanumSquare Neo Regular" pitchFamily="2" charset="-127"/>
               </a:rPr>
               <a:t>DFM (현행 시스템의 중심)</a:t>
             </a:r>
@@ -3684,7 +3701,7 @@
         <p:spPr>
           <a:xfrm>
             <a:off x="731520" y="2971800"/>
-            <a:ext cx="3200400" cy="2194560"/>
+            <a:ext cx="3200400" cy="973087"/>
           </a:xfrm>
           <a:prstGeom prst="rect">
             <a:avLst/>
@@ -3692,7 +3709,7 @@
           <a:noFill/>
         </p:spPr>
         <p:txBody>
-          <a:bodyPr wrap="square" anchor="t" lIns="45720" rIns="45720" tIns="18288" bIns="18288">
+          <a:bodyPr wrap="square" lIns="45720" tIns="18288" rIns="45720" bIns="18288" anchor="t">
             <a:spAutoFit/>
           </a:bodyPr>
           <a:lstStyle/>
@@ -3707,8 +3724,8 @@
                 <a:solidFill>
                   <a:srgbClr val="6B6B6B"/>
                 </a:solidFill>
-                <a:latin typeface="Apple SD Gothic Neo"/>
-                <a:ea typeface="Apple SD Gothic Neo"/>
+                <a:latin typeface="NanumSquare Neo Regular" pitchFamily="2" charset="-127"/>
+                <a:ea typeface="NanumSquare Neo Regular" pitchFamily="2" charset="-127"/>
               </a:rPr>
               <a:t>· </a:t>
             </a:r>
@@ -3717,8 +3734,8 @@
                 <a:solidFill>
                   <a:srgbClr val="262626"/>
                 </a:solidFill>
-                <a:latin typeface="Apple SD Gothic Neo"/>
-                <a:ea typeface="Apple SD Gothic Neo"/>
+                <a:latin typeface="NanumSquare Neo Regular" pitchFamily="2" charset="-127"/>
+                <a:ea typeface="NanumSquare Neo Regular" pitchFamily="2" charset="-127"/>
               </a:rPr>
               <a:t>정통 요인모형. 공식지표 34종을 종합해</a:t>
             </a:r>
@@ -3734,8 +3751,8 @@
                 <a:solidFill>
                   <a:srgbClr val="6B6B6B"/>
                 </a:solidFill>
-                <a:latin typeface="Apple SD Gothic Neo"/>
-                <a:ea typeface="Apple SD Gothic Neo"/>
+                <a:latin typeface="NanumSquare Neo Regular" pitchFamily="2" charset="-127"/>
+                <a:ea typeface="NanumSquare Neo Regular" pitchFamily="2" charset="-127"/>
               </a:rPr>
               <a:t>· </a:t>
             </a:r>
@@ -3744,8 +3761,8 @@
                 <a:solidFill>
                   <a:srgbClr val="262626"/>
                 </a:solidFill>
-                <a:latin typeface="Apple SD Gothic Neo"/>
-                <a:ea typeface="Apple SD Gothic Neo"/>
+                <a:latin typeface="NanumSquare Neo Regular" pitchFamily="2" charset="-127"/>
+                <a:ea typeface="NanumSquare Neo Regular" pitchFamily="2" charset="-127"/>
               </a:rPr>
               <a:t>월별 GDP 흐름의 '초안'을 작성</a:t>
             </a:r>
@@ -3761,8 +3778,8 @@
                 <a:solidFill>
                   <a:srgbClr val="6B6B6B"/>
                 </a:solidFill>
-                <a:latin typeface="Apple SD Gothic Neo"/>
-                <a:ea typeface="Apple SD Gothic Neo"/>
+                <a:latin typeface="NanumSquare Neo Regular" pitchFamily="2" charset="-127"/>
+                <a:ea typeface="NanumSquare Neo Regular" pitchFamily="2" charset="-127"/>
               </a:rPr>
               <a:t>· </a:t>
             </a:r>
@@ -3771,8 +3788,8 @@
                 <a:solidFill>
                   <a:srgbClr val="243447"/>
                 </a:solidFill>
-                <a:latin typeface="Apple SD Gothic Neo"/>
-                <a:ea typeface="Apple SD Gothic Neo"/>
+                <a:latin typeface="NanumSquare Neo Regular" pitchFamily="2" charset="-127"/>
+                <a:ea typeface="NanumSquare Neo Regular" pitchFamily="2" charset="-127"/>
               </a:rPr>
               <a:t>보는 것: 물가·수출·생산·심리 등 34종</a:t>
             </a:r>
@@ -3788,8 +3805,8 @@
                 <a:solidFill>
                   <a:srgbClr val="6B6B6B"/>
                 </a:solidFill>
-                <a:latin typeface="Apple SD Gothic Neo"/>
-                <a:ea typeface="Apple SD Gothic Neo"/>
+                <a:latin typeface="NanumSquare Neo Regular" pitchFamily="2" charset="-127"/>
+                <a:ea typeface="NanumSquare Neo Regular" pitchFamily="2" charset="-127"/>
               </a:rPr>
               <a:t>· </a:t>
             </a:r>
@@ -3798,8 +3815,8 @@
                 <a:solidFill>
                   <a:srgbClr val="243447"/>
                 </a:solidFill>
-                <a:latin typeface="Apple SD Gothic Neo"/>
-                <a:ea typeface="Apple SD Gothic Neo"/>
+                <a:latin typeface="NanumSquare Neo Regular" pitchFamily="2" charset="-127"/>
+                <a:ea typeface="NanumSquare Neo Regular" pitchFamily="2" charset="-127"/>
               </a:rPr>
               <a:t>못 보는 것: 주가·환율 시세판 (규정 외)</a:t>
             </a:r>
@@ -3815,8 +3832,8 @@
                 <a:solidFill>
                   <a:srgbClr val="6B6B6B"/>
                 </a:solidFill>
-                <a:latin typeface="Apple SD Gothic Neo"/>
-                <a:ea typeface="Apple SD Gothic Neo"/>
+                <a:latin typeface="NanumSquare Neo Regular" pitchFamily="2" charset="-127"/>
+                <a:ea typeface="NanumSquare Neo Regular" pitchFamily="2" charset="-127"/>
               </a:rPr>
               <a:t>· </a:t>
             </a:r>
@@ -3825,8 +3842,8 @@
                 <a:solidFill>
                   <a:srgbClr val="262626"/>
                 </a:solidFill>
-                <a:latin typeface="Apple SD Gothic Neo"/>
-                <a:ea typeface="Apple SD Gothic Neo"/>
+                <a:latin typeface="NanumSquare Neo Regular" pitchFamily="2" charset="-127"/>
+                <a:ea typeface="NanumSquare Neo Regular" pitchFamily="2" charset="-127"/>
               </a:rPr>
               <a:t>약점: 급변기에 반 박자 느림</a:t>
             </a:r>
@@ -3876,6 +3893,10 @@
           <a:lstStyle/>
           <a:p>
             <a:pPr algn="ctr"/>
+            <a:endParaRPr>
+              <a:latin typeface="NanumSquare Neo Regular" pitchFamily="2" charset="-127"/>
+              <a:ea typeface="NanumSquare Neo Regular" pitchFamily="2" charset="-127"/>
+            </a:endParaRPr>
           </a:p>
         </p:txBody>
       </p:sp>
@@ -3888,7 +3909,7 @@
         <p:spPr>
           <a:xfrm>
             <a:off x="4553712" y="1463040"/>
-            <a:ext cx="3200400" cy="640080"/>
+            <a:ext cx="3200400" cy="498598"/>
           </a:xfrm>
           <a:prstGeom prst="rect">
             <a:avLst/>
@@ -3896,7 +3917,7 @@
           <a:noFill/>
         </p:spPr>
         <p:txBody>
-          <a:bodyPr wrap="square" anchor="t" lIns="45720" rIns="45720" tIns="18288" bIns="18288">
+          <a:bodyPr wrap="square" lIns="45720" tIns="18288" rIns="45720" bIns="18288" anchor="t">
             <a:spAutoFit/>
           </a:bodyPr>
           <a:lstStyle/>
@@ -3911,8 +3932,8 @@
                 <a:solidFill>
                   <a:srgbClr val="262626"/>
                 </a:solidFill>
-                <a:latin typeface="Apple SD Gothic Neo"/>
-                <a:ea typeface="Apple SD Gothic Neo"/>
+                <a:latin typeface="NanumSquare Neo Regular" pitchFamily="2" charset="-127"/>
+                <a:ea typeface="NanumSquare Neo Regular" pitchFamily="2" charset="-127"/>
               </a:rPr>
               <a:t>🔧</a:t>
             </a:r>
@@ -3928,7 +3949,7 @@
         <p:spPr>
           <a:xfrm>
             <a:off x="4553712" y="2148840"/>
-            <a:ext cx="3200400" cy="365760"/>
+            <a:ext cx="3200400" cy="252377"/>
           </a:xfrm>
           <a:prstGeom prst="rect">
             <a:avLst/>
@@ -3936,7 +3957,7 @@
           <a:noFill/>
         </p:spPr>
         <p:txBody>
-          <a:bodyPr wrap="square" anchor="t" lIns="45720" rIns="45720" tIns="18288" bIns="18288">
+          <a:bodyPr wrap="square" lIns="45720" tIns="18288" rIns="45720" bIns="18288" anchor="t">
             <a:spAutoFit/>
           </a:bodyPr>
           <a:lstStyle/>
@@ -3951,8 +3972,8 @@
                 <a:solidFill>
                   <a:srgbClr val="243447"/>
                 </a:solidFill>
-                <a:latin typeface="Apple SD Gothic Neo"/>
-                <a:ea typeface="Apple SD Gothic Neo"/>
+                <a:latin typeface="NanumSquare Neo Regular" pitchFamily="2" charset="-127"/>
+                <a:ea typeface="NanumSquare Neo Regular" pitchFamily="2" charset="-127"/>
               </a:rPr>
               <a:t>꼼꼼한 조수</a:t>
             </a:r>
@@ -3968,7 +3989,7 @@
         <p:spPr>
           <a:xfrm>
             <a:off x="4553712" y="2487168"/>
-            <a:ext cx="3200400" cy="320040"/>
+            <a:ext cx="3200400" cy="198516"/>
           </a:xfrm>
           <a:prstGeom prst="rect">
             <a:avLst/>
@@ -3976,7 +3997,7 @@
           <a:noFill/>
         </p:spPr>
         <p:txBody>
-          <a:bodyPr wrap="square" anchor="t" lIns="45720" rIns="45720" tIns="18288" bIns="18288">
+          <a:bodyPr wrap="square" lIns="45720" tIns="18288" rIns="45720" bIns="18288" anchor="t">
             <a:spAutoFit/>
           </a:bodyPr>
           <a:lstStyle/>
@@ -3991,8 +4012,8 @@
                 <a:solidFill>
                   <a:srgbClr val="6B6B6B"/>
                 </a:solidFill>
-                <a:latin typeface="Apple SD Gothic Neo"/>
-                <a:ea typeface="Apple SD Gothic Neo"/>
+                <a:latin typeface="NanumSquare Neo Regular" pitchFamily="2" charset="-127"/>
+                <a:ea typeface="NanumSquare Neo Regular" pitchFamily="2" charset="-127"/>
               </a:rPr>
               <a:t>XGBoost (머신러닝 보정)</a:t>
             </a:r>
@@ -4043,7 +4064,7 @@
         <p:spPr>
           <a:xfrm>
             <a:off x="4553712" y="2971800"/>
-            <a:ext cx="3200400" cy="2194560"/>
+            <a:ext cx="3200400" cy="973087"/>
           </a:xfrm>
           <a:prstGeom prst="rect">
             <a:avLst/>
@@ -4051,7 +4072,7 @@
           <a:noFill/>
         </p:spPr>
         <p:txBody>
-          <a:bodyPr wrap="square" anchor="t" lIns="45720" rIns="45720" tIns="18288" bIns="18288">
+          <a:bodyPr wrap="square" lIns="45720" tIns="18288" rIns="45720" bIns="18288" anchor="t">
             <a:spAutoFit/>
           </a:bodyPr>
           <a:lstStyle/>
@@ -4066,8 +4087,8 @@
                 <a:solidFill>
                   <a:srgbClr val="6B6B6B"/>
                 </a:solidFill>
-                <a:latin typeface="Apple SD Gothic Neo"/>
-                <a:ea typeface="Apple SD Gothic Neo"/>
+                <a:latin typeface="NanumSquare Neo Regular" pitchFamily="2" charset="-127"/>
+                <a:ea typeface="NanumSquare Neo Regular" pitchFamily="2" charset="-127"/>
               </a:rPr>
               <a:t>· </a:t>
             </a:r>
@@ -4076,8 +4097,8 @@
                 <a:solidFill>
                   <a:srgbClr val="262626"/>
                 </a:solidFill>
-                <a:latin typeface="Apple SD Gothic Neo"/>
-                <a:ea typeface="Apple SD Gothic Neo"/>
+                <a:latin typeface="NanumSquare Neo Regular" pitchFamily="2" charset="-127"/>
+                <a:ea typeface="NanumSquare Neo Regular" pitchFamily="2" charset="-127"/>
               </a:rPr>
               <a:t>원로의 초안을 받아 과거 12년 패턴으로</a:t>
             </a:r>
@@ -4093,8 +4114,8 @@
                 <a:solidFill>
                   <a:srgbClr val="6B6B6B"/>
                 </a:solidFill>
-                <a:latin typeface="Apple SD Gothic Neo"/>
-                <a:ea typeface="Apple SD Gothic Neo"/>
+                <a:latin typeface="NanumSquare Neo Regular" pitchFamily="2" charset="-127"/>
+                <a:ea typeface="NanumSquare Neo Regular" pitchFamily="2" charset="-127"/>
               </a:rPr>
               <a:t>· </a:t>
             </a:r>
@@ -4103,8 +4124,8 @@
                 <a:solidFill>
                   <a:srgbClr val="262626"/>
                 </a:solidFill>
-                <a:latin typeface="Apple SD Gothic Neo"/>
-                <a:ea typeface="Apple SD Gothic Neo"/>
+                <a:latin typeface="NanumSquare Neo Regular" pitchFamily="2" charset="-127"/>
+                <a:ea typeface="NanumSquare Neo Regular" pitchFamily="2" charset="-127"/>
               </a:rPr>
               <a:t>비선형 보정 — 원로와 콤비로 현행 최고</a:t>
             </a:r>
@@ -4120,8 +4141,8 @@
                 <a:solidFill>
                   <a:srgbClr val="6B6B6B"/>
                 </a:solidFill>
-                <a:latin typeface="Apple SD Gothic Neo"/>
-                <a:ea typeface="Apple SD Gothic Neo"/>
+                <a:latin typeface="NanumSquare Neo Regular" pitchFamily="2" charset="-127"/>
+                <a:ea typeface="NanumSquare Neo Regular" pitchFamily="2" charset="-127"/>
               </a:rPr>
               <a:t>· </a:t>
             </a:r>
@@ -4130,8 +4151,8 @@
                 <a:solidFill>
                   <a:srgbClr val="243447"/>
                 </a:solidFill>
-                <a:latin typeface="Apple SD Gothic Neo"/>
-                <a:ea typeface="Apple SD Gothic Neo"/>
+                <a:latin typeface="NanumSquare Neo Regular" pitchFamily="2" charset="-127"/>
+                <a:ea typeface="NanumSquare Neo Regular" pitchFamily="2" charset="-127"/>
               </a:rPr>
               <a:t>보는 것: 원로와 같은 34종 + 원로의 초안</a:t>
             </a:r>
@@ -4147,8 +4168,8 @@
                 <a:solidFill>
                   <a:srgbClr val="6B6B6B"/>
                 </a:solidFill>
-                <a:latin typeface="Apple SD Gothic Neo"/>
-                <a:ea typeface="Apple SD Gothic Neo"/>
+                <a:latin typeface="NanumSquare Neo Regular" pitchFamily="2" charset="-127"/>
+                <a:ea typeface="NanumSquare Neo Regular" pitchFamily="2" charset="-127"/>
               </a:rPr>
               <a:t>· </a:t>
             </a:r>
@@ -4157,8 +4178,8 @@
                 <a:solidFill>
                   <a:srgbClr val="243447"/>
                 </a:solidFill>
-                <a:latin typeface="Apple SD Gothic Neo"/>
-                <a:ea typeface="Apple SD Gothic Neo"/>
+                <a:latin typeface="NanumSquare Neo Regular" pitchFamily="2" charset="-127"/>
+                <a:ea typeface="NanumSquare Neo Regular" pitchFamily="2" charset="-127"/>
               </a:rPr>
               <a:t>못 보는 것: 역시 시세판은 못 봄</a:t>
             </a:r>
@@ -4174,8 +4195,8 @@
                 <a:solidFill>
                   <a:srgbClr val="6B6B6B"/>
                 </a:solidFill>
-                <a:latin typeface="Apple SD Gothic Neo"/>
-                <a:ea typeface="Apple SD Gothic Neo"/>
+                <a:latin typeface="NanumSquare Neo Regular" pitchFamily="2" charset="-127"/>
+                <a:ea typeface="NanumSquare Neo Regular" pitchFamily="2" charset="-127"/>
               </a:rPr>
               <a:t>· </a:t>
             </a:r>
@@ -4184,8 +4205,8 @@
                 <a:solidFill>
                   <a:srgbClr val="262626"/>
                 </a:solidFill>
-                <a:latin typeface="Apple SD Gothic Neo"/>
-                <a:ea typeface="Apple SD Gothic Neo"/>
+                <a:latin typeface="NanumSquare Neo Regular" pitchFamily="2" charset="-127"/>
+                <a:ea typeface="NanumSquare Neo Regular" pitchFamily="2" charset="-127"/>
               </a:rPr>
               <a:t>약점: 가끔 혼자 지나치게 비관·낙관</a:t>
             </a:r>
@@ -4235,6 +4256,10 @@
           <a:lstStyle/>
           <a:p>
             <a:pPr algn="ctr"/>
+            <a:endParaRPr>
+              <a:latin typeface="NanumSquare Neo Regular" pitchFamily="2" charset="-127"/>
+              <a:ea typeface="NanumSquare Neo Regular" pitchFamily="2" charset="-127"/>
+            </a:endParaRPr>
           </a:p>
         </p:txBody>
       </p:sp>
@@ -4247,7 +4272,7 @@
         <p:spPr>
           <a:xfrm>
             <a:off x="8375904" y="1463040"/>
-            <a:ext cx="3200400" cy="640080"/>
+            <a:ext cx="3200400" cy="498598"/>
           </a:xfrm>
           <a:prstGeom prst="rect">
             <a:avLst/>
@@ -4255,7 +4280,7 @@
           <a:noFill/>
         </p:spPr>
         <p:txBody>
-          <a:bodyPr wrap="square" anchor="t" lIns="45720" rIns="45720" tIns="18288" bIns="18288">
+          <a:bodyPr wrap="square" lIns="45720" tIns="18288" rIns="45720" bIns="18288" anchor="t">
             <a:spAutoFit/>
           </a:bodyPr>
           <a:lstStyle/>
@@ -4270,8 +4295,8 @@
                 <a:solidFill>
                   <a:srgbClr val="262626"/>
                 </a:solidFill>
-                <a:latin typeface="Apple SD Gothic Neo"/>
-                <a:ea typeface="Apple SD Gothic Neo"/>
+                <a:latin typeface="NanumSquare Neo Regular" pitchFamily="2" charset="-127"/>
+                <a:ea typeface="NanumSquare Neo Regular" pitchFamily="2" charset="-127"/>
               </a:rPr>
               <a:t>🛰️</a:t>
             </a:r>
@@ -4287,7 +4312,7 @@
         <p:spPr>
           <a:xfrm>
             <a:off x="8375904" y="2148840"/>
-            <a:ext cx="3200400" cy="365760"/>
+            <a:ext cx="3200400" cy="252377"/>
           </a:xfrm>
           <a:prstGeom prst="rect">
             <a:avLst/>
@@ -4295,7 +4320,7 @@
           <a:noFill/>
         </p:spPr>
         <p:txBody>
-          <a:bodyPr wrap="square" anchor="t" lIns="45720" rIns="45720" tIns="18288" bIns="18288">
+          <a:bodyPr wrap="square" lIns="45720" tIns="18288" rIns="45720" bIns="18288" anchor="t">
             <a:spAutoFit/>
           </a:bodyPr>
           <a:lstStyle/>
@@ -4310,8 +4335,8 @@
                 <a:solidFill>
                   <a:srgbClr val="243447"/>
                 </a:solidFill>
-                <a:latin typeface="Apple SD Gothic Neo"/>
-                <a:ea typeface="Apple SD Gothic Neo"/>
+                <a:latin typeface="NanumSquare Neo Regular" pitchFamily="2" charset="-127"/>
+                <a:ea typeface="NanumSquare Neo Regular" pitchFamily="2" charset="-127"/>
               </a:rPr>
               <a:t>외국인 컨설턴트</a:t>
             </a:r>
@@ -4327,7 +4352,7 @@
         <p:spPr>
           <a:xfrm>
             <a:off x="8375904" y="2487168"/>
-            <a:ext cx="3200400" cy="320040"/>
+            <a:ext cx="3200400" cy="198516"/>
           </a:xfrm>
           <a:prstGeom prst="rect">
             <a:avLst/>
@@ -4335,7 +4360,7 @@
           <a:noFill/>
         </p:spPr>
         <p:txBody>
-          <a:bodyPr wrap="square" anchor="t" lIns="45720" rIns="45720" tIns="18288" bIns="18288">
+          <a:bodyPr wrap="square" lIns="45720" tIns="18288" rIns="45720" bIns="18288" anchor="t">
             <a:spAutoFit/>
           </a:bodyPr>
           <a:lstStyle/>
@@ -4350,8 +4375,8 @@
                 <a:solidFill>
                   <a:srgbClr val="6B6B6B"/>
                 </a:solidFill>
-                <a:latin typeface="Apple SD Gothic Neo"/>
-                <a:ea typeface="Apple SD Gothic Neo"/>
+                <a:latin typeface="NanumSquare Neo Regular" pitchFamily="2" charset="-127"/>
+                <a:ea typeface="NanumSquare Neo Regular" pitchFamily="2" charset="-127"/>
               </a:rPr>
               <a:t>Chronos-2f (사전학습 AI, 딥러닝)</a:t>
             </a:r>
@@ -4402,7 +4427,7 @@
         <p:spPr>
           <a:xfrm>
             <a:off x="8375904" y="2971800"/>
-            <a:ext cx="3200400" cy="2194560"/>
+            <a:ext cx="3200400" cy="973087"/>
           </a:xfrm>
           <a:prstGeom prst="rect">
             <a:avLst/>
@@ -4410,7 +4435,7 @@
           <a:noFill/>
         </p:spPr>
         <p:txBody>
-          <a:bodyPr wrap="square" anchor="t" lIns="45720" rIns="45720" tIns="18288" bIns="18288">
+          <a:bodyPr wrap="square" lIns="45720" tIns="18288" rIns="45720" bIns="18288" anchor="t">
             <a:spAutoFit/>
           </a:bodyPr>
           <a:lstStyle/>
@@ -4425,8 +4450,8 @@
                 <a:solidFill>
                   <a:srgbClr val="6B6B6B"/>
                 </a:solidFill>
-                <a:latin typeface="Apple SD Gothic Neo"/>
-                <a:ea typeface="Apple SD Gothic Neo"/>
+                <a:latin typeface="NanumSquare Neo Regular" pitchFamily="2" charset="-127"/>
+                <a:ea typeface="NanumSquare Neo Regular" pitchFamily="2" charset="-127"/>
               </a:rPr>
               <a:t>· </a:t>
             </a:r>
@@ -4435,8 +4460,8 @@
                 <a:solidFill>
                   <a:srgbClr val="262626"/>
                 </a:solidFill>
-                <a:latin typeface="Apple SD Gothic Neo"/>
-                <a:ea typeface="Apple SD Gothic Neo"/>
+                <a:latin typeface="NanumSquare Neo Regular" pitchFamily="2" charset="-127"/>
+                <a:ea typeface="NanumSquare Neo Regular" pitchFamily="2" charset="-127"/>
               </a:rPr>
               <a:t>한국 데이터로 공부한 적 없음 — 전 세계</a:t>
             </a:r>
@@ -4452,8 +4477,8 @@
                 <a:solidFill>
                   <a:srgbClr val="6B6B6B"/>
                 </a:solidFill>
-                <a:latin typeface="Apple SD Gothic Neo"/>
-                <a:ea typeface="Apple SD Gothic Neo"/>
+                <a:latin typeface="NanumSquare Neo Regular" pitchFamily="2" charset="-127"/>
+                <a:ea typeface="NanumSquare Neo Regular" pitchFamily="2" charset="-127"/>
               </a:rPr>
               <a:t>· </a:t>
             </a:r>
@@ -4462,8 +4487,8 @@
                 <a:solidFill>
                   <a:srgbClr val="262626"/>
                 </a:solidFill>
-                <a:latin typeface="Apple SD Gothic Neo"/>
-                <a:ea typeface="Apple SD Gothic Neo"/>
+                <a:latin typeface="NanumSquare Neo Regular" pitchFamily="2" charset="-127"/>
+                <a:ea typeface="NanumSquare Neo Regular" pitchFamily="2" charset="-127"/>
               </a:rPr>
               <a:t>수백만 개 시계열 패턴을 미리 학습(zero-shot)</a:t>
             </a:r>
@@ -4479,8 +4504,8 @@
                 <a:solidFill>
                   <a:srgbClr val="6B6B6B"/>
                 </a:solidFill>
-                <a:latin typeface="Apple SD Gothic Neo"/>
-                <a:ea typeface="Apple SD Gothic Neo"/>
+                <a:latin typeface="NanumSquare Neo Regular" pitchFamily="2" charset="-127"/>
+                <a:ea typeface="NanumSquare Neo Regular" pitchFamily="2" charset="-127"/>
               </a:rPr>
               <a:t>· </a:t>
             </a:r>
@@ -4489,8 +4514,8 @@
                 <a:solidFill>
                   <a:srgbClr val="243447"/>
                 </a:solidFill>
-                <a:latin typeface="Apple SD Gothic Neo"/>
-                <a:ea typeface="Apple SD Gothic Neo"/>
+                <a:latin typeface="NanumSquare Neo Regular" pitchFamily="2" charset="-127"/>
+                <a:ea typeface="NanumSquare Neo Regular" pitchFamily="2" charset="-127"/>
               </a:rPr>
               <a:t>보는 것: 원로의 초안 + 유일하게 시세판</a:t>
             </a:r>
@@ -4506,8 +4531,8 @@
                 <a:solidFill>
                   <a:srgbClr val="6B6B6B"/>
                 </a:solidFill>
-                <a:latin typeface="Apple SD Gothic Neo"/>
-                <a:ea typeface="Apple SD Gothic Neo"/>
+                <a:latin typeface="NanumSquare Neo Regular" pitchFamily="2" charset="-127"/>
+                <a:ea typeface="NanumSquare Neo Regular" pitchFamily="2" charset="-127"/>
               </a:rPr>
               <a:t>  (일별 KOSPI·원달러 + 심리 원지수)</a:t>
             </a:r>
@@ -4523,8 +4548,8 @@
                 <a:solidFill>
                   <a:srgbClr val="6B6B6B"/>
                 </a:solidFill>
-                <a:latin typeface="Apple SD Gothic Neo"/>
-                <a:ea typeface="Apple SD Gothic Neo"/>
+                <a:latin typeface="NanumSquare Neo Regular" pitchFamily="2" charset="-127"/>
+                <a:ea typeface="NanumSquare Neo Regular" pitchFamily="2" charset="-127"/>
               </a:rPr>
               <a:t>· </a:t>
             </a:r>
@@ -4533,8 +4558,8 @@
                 <a:solidFill>
                   <a:srgbClr val="262626"/>
                 </a:solidFill>
-                <a:latin typeface="Apple SD Gothic Neo"/>
-                <a:ea typeface="Apple SD Gothic Neo"/>
+                <a:latin typeface="NanumSquare Neo Regular" pitchFamily="2" charset="-127"/>
+                <a:ea typeface="NanumSquare Neo Regular" pitchFamily="2" charset="-127"/>
               </a:rPr>
               <a:t>약점: 평온기엔 원로+조수 콤비보다 부정확</a:t>
             </a:r>
@@ -4550,7 +4575,7 @@
         <p:spPr>
           <a:xfrm>
             <a:off x="502920" y="5120640"/>
-            <a:ext cx="11155680" cy="548640"/>
+            <a:ext cx="11155680" cy="206210"/>
           </a:xfrm>
           <a:prstGeom prst="rect">
             <a:avLst/>
@@ -4558,7 +4583,7 @@
           <a:noFill/>
         </p:spPr>
         <p:txBody>
-          <a:bodyPr wrap="square" anchor="t" lIns="45720" rIns="45720" tIns="18288" bIns="18288">
+          <a:bodyPr wrap="square" lIns="45720" tIns="18288" rIns="45720" bIns="18288" anchor="t">
             <a:spAutoFit/>
           </a:bodyPr>
           <a:lstStyle/>
@@ -4573,8 +4598,8 @@
                 <a:solidFill>
                   <a:srgbClr val="243447"/>
                 </a:solidFill>
-                <a:latin typeface="Apple SD Gothic Neo"/>
-                <a:ea typeface="Apple SD Gothic Neo"/>
+                <a:latin typeface="NanumSquare Neo Regular" pitchFamily="2" charset="-127"/>
+                <a:ea typeface="NanumSquare Neo Regular" pitchFamily="2" charset="-127"/>
               </a:rPr>
               <a:t>성적표 (8년 32분기 실시간 재현 오차, 낮을수록 정확)   </a:t>
             </a:r>
@@ -4583,8 +4608,8 @@
                 <a:solidFill>
                   <a:srgbClr val="262626"/>
                 </a:solidFill>
-                <a:latin typeface="Apple SD Gothic Neo"/>
-                <a:ea typeface="Apple SD Gothic Neo"/>
+                <a:latin typeface="NanumSquare Neo Regular" pitchFamily="2" charset="-127"/>
+                <a:ea typeface="NanumSquare Neo Regular" pitchFamily="2" charset="-127"/>
               </a:rPr>
               <a:t>원로 단독 0.865   ·   원로+조수 0.765 </a:t>
             </a:r>
@@ -4593,8 +4618,8 @@
                 <a:solidFill>
                   <a:srgbClr val="008A3E"/>
                 </a:solidFill>
-                <a:latin typeface="Apple SD Gothic Neo"/>
-                <a:ea typeface="Apple SD Gothic Neo"/>
+                <a:latin typeface="NanumSquare Neo Regular" pitchFamily="2" charset="-127"/>
+                <a:ea typeface="NanumSquare Neo Regular" pitchFamily="2" charset="-127"/>
               </a:rPr>
               <a:t>← 현행 최고</a:t>
             </a:r>
@@ -4603,8 +4628,8 @@
                 <a:solidFill>
                   <a:srgbClr val="262626"/>
                 </a:solidFill>
-                <a:latin typeface="Apple SD Gothic Neo"/>
-                <a:ea typeface="Apple SD Gothic Neo"/>
+                <a:latin typeface="NanumSquare Neo Regular" pitchFamily="2" charset="-127"/>
+                <a:ea typeface="NanumSquare Neo Regular" pitchFamily="2" charset="-127"/>
               </a:rPr>
               <a:t>   ·   컨설턴트 단독 0.808</a:t>
             </a:r>
@@ -4654,6 +4679,10 @@
           <a:lstStyle/>
           <a:p>
             <a:pPr algn="ctr"/>
+            <a:endParaRPr>
+              <a:latin typeface="NanumSquare Neo Regular" pitchFamily="2" charset="-127"/>
+              <a:ea typeface="NanumSquare Neo Regular" pitchFamily="2" charset="-127"/>
+            </a:endParaRPr>
           </a:p>
         </p:txBody>
       </p:sp>
@@ -4665,8 +4694,8 @@
         </p:nvSpPr>
         <p:spPr>
           <a:xfrm>
-            <a:off x="685800" y="6318504"/>
-            <a:ext cx="10881360" cy="274320"/>
+            <a:off x="685800" y="6367947"/>
+            <a:ext cx="10881360" cy="175433"/>
           </a:xfrm>
           <a:prstGeom prst="rect">
             <a:avLst/>
@@ -4674,7 +4703,7 @@
           <a:noFill/>
         </p:spPr>
         <p:txBody>
-          <a:bodyPr wrap="square" anchor="ctr" lIns="45720" rIns="45720" tIns="18288" bIns="18288">
+          <a:bodyPr wrap="square" lIns="45720" tIns="18288" rIns="45720" bIns="18288" anchor="ctr">
             <a:spAutoFit/>
           </a:bodyPr>
           <a:lstStyle/>
@@ -4689,8 +4718,8 @@
                 <a:solidFill>
                   <a:srgbClr val="6B6B6B"/>
                 </a:solidFill>
-                <a:latin typeface="Apple SD Gothic Neo"/>
-                <a:ea typeface="Apple SD Gothic Neo"/>
+                <a:latin typeface="NanumSquare Neo Regular" pitchFamily="2" charset="-127"/>
+                <a:ea typeface="NanumSquare Neo Regular" pitchFamily="2" charset="-127"/>
               </a:rPr>
               <a:t>모두 동일 조건: 한은 실시간 빈티지, 속보치 기준, 전망주차 w[-19,-1] 평균 RMSE, 2018Q1~2025Q4</a:t>
             </a:r>
@@ -4706,7 +4735,7 @@
 </file>
 
 <file path=ppt/slides/slide3.xml><?xml version="1.0" encoding="utf-8"?>
-<p:sld xmlns:a="http://schemas.openxmlformats.org/drawingml/2006/main" xmlns:p="http://schemas.openxmlformats.org/presentationml/2006/main" xmlns:r="http://schemas.openxmlformats.org/officeDocument/2006/relationships">
+<p:sld xmlns:a="http://schemas.openxmlformats.org/drawingml/2006/main" xmlns:r="http://schemas.openxmlformats.org/officeDocument/2006/relationships" xmlns:p="http://schemas.openxmlformats.org/presentationml/2006/main">
   <p:cSld>
     <p:spTree>
       <p:nvGrpSpPr>
@@ -4714,7 +4743,14 @@
         <p:cNvGrpSpPr/>
         <p:nvPr/>
       </p:nvGrpSpPr>
-      <p:grpSpPr/>
+      <p:grpSpPr>
+        <a:xfrm>
+          <a:off x="0" y="0"/>
+          <a:ext cx="0" cy="0"/>
+          <a:chOff x="0" y="0"/>
+          <a:chExt cx="0" cy="0"/>
+        </a:xfrm>
+      </p:grpSpPr>
       <p:sp>
         <p:nvSpPr>
           <p:cNvPr id="2" name="TextBox 1"/>
@@ -4724,7 +4760,7 @@
         <p:spPr>
           <a:xfrm>
             <a:off x="502920" y="274320"/>
-            <a:ext cx="11155680" cy="502920"/>
+            <a:ext cx="11155680" cy="344710"/>
           </a:xfrm>
           <a:prstGeom prst="rect">
             <a:avLst/>
@@ -4732,7 +4768,7 @@
           <a:noFill/>
         </p:spPr>
         <p:txBody>
-          <a:bodyPr wrap="square" anchor="t" lIns="45720" rIns="45720" tIns="18288" bIns="18288">
+          <a:bodyPr wrap="square" lIns="45720" tIns="18288" rIns="45720" bIns="18288" anchor="t">
             <a:spAutoFit/>
           </a:bodyPr>
           <a:lstStyle/>
@@ -4747,8 +4783,8 @@
                 <a:solidFill>
                   <a:srgbClr val="008A3E"/>
                 </a:solidFill>
-                <a:latin typeface="Apple SD Gothic Neo"/>
-                <a:ea typeface="Apple SD Gothic Neo"/>
+                <a:latin typeface="NanumSquare Neo Regular" pitchFamily="2" charset="-127"/>
+                <a:ea typeface="NanumSquare Neo Regular" pitchFamily="2" charset="-127"/>
               </a:rPr>
               <a:t>02  </a:t>
             </a:r>
@@ -4757,8 +4793,8 @@
                 <a:solidFill>
                   <a:srgbClr val="243447"/>
                 </a:solidFill>
-                <a:latin typeface="Apple SD Gothic Neo"/>
-                <a:ea typeface="Apple SD Gothic Neo"/>
+                <a:latin typeface="NanumSquare Neo Regular" pitchFamily="2" charset="-127"/>
+                <a:ea typeface="NanumSquare Neo Regular" pitchFamily="2" charset="-127"/>
               </a:rPr>
               <a:t>사건 — 2020년 여름, 시세판은 알고 있었다</a:t>
             </a:r>
@@ -4809,7 +4845,7 @@
         <p:spPr>
           <a:xfrm>
             <a:off x="502920" y="1188720"/>
-            <a:ext cx="5029200" cy="4389120"/>
+            <a:ext cx="5029200" cy="3165995"/>
           </a:xfrm>
           <a:prstGeom prst="rect">
             <a:avLst/>
@@ -4817,7 +4853,7 @@
           <a:noFill/>
         </p:spPr>
         <p:txBody>
-          <a:bodyPr wrap="square" anchor="t" lIns="45720" rIns="45720" tIns="18288" bIns="18288">
+          <a:bodyPr wrap="square" lIns="45720" tIns="18288" rIns="45720" bIns="18288" anchor="t">
             <a:spAutoFit/>
           </a:bodyPr>
           <a:lstStyle/>
@@ -4832,8 +4868,8 @@
                 <a:solidFill>
                   <a:srgbClr val="243447"/>
                 </a:solidFill>
-                <a:latin typeface="Apple SD Gothic Neo"/>
-                <a:ea typeface="Apple SD Gothic Neo"/>
+                <a:latin typeface="NanumSquare Neo Regular" pitchFamily="2" charset="-127"/>
+                <a:ea typeface="NanumSquare Neo Regular" pitchFamily="2" charset="-127"/>
               </a:rPr>
               <a:t>코로나 직후, 3분기 반등을 맞힐 수 있는가</a:t>
             </a:r>
@@ -4844,15 +4880,29 @@
                 <a:spcPts val="200"/>
               </a:spcAft>
             </a:pPr>
-            <a:r>
-              <a:rPr sz="600" b="0">
+            <a:endParaRPr sz="1300" b="1">
+              <a:solidFill>
+                <a:srgbClr val="243447"/>
+              </a:solidFill>
+              <a:latin typeface="NanumSquare Neo Regular" pitchFamily="2" charset="-127"/>
+              <a:ea typeface="NanumSquare Neo Regular" pitchFamily="2" charset="-127"/>
+            </a:endParaRPr>
+          </a:p>
+          <a:p>
+            <a:pPr algn="l">
+              <a:spcAft>
+                <a:spcPts val="200"/>
+              </a:spcAft>
+            </a:pPr>
+            <a:r>
+              <a:rPr sz="1100" b="0">
                 <a:solidFill>
                   <a:srgbClr val="262626"/>
                 </a:solidFill>
-                <a:latin typeface="Apple SD Gothic Neo"/>
-                <a:ea typeface="Apple SD Gothic Neo"/>
-              </a:rPr>
-              <a:t/>
+                <a:latin typeface="NanumSquare Neo Regular" pitchFamily="2" charset="-127"/>
+                <a:ea typeface="NanumSquare Neo Regular" pitchFamily="2" charset="-127"/>
+              </a:rPr>
+              <a:t>· 공식 심리지표(ESI)는 4월 55.7로 바닥을 찍고</a:t>
             </a:r>
           </a:p>
           <a:p>
@@ -4866,10 +4916,10 @@
                 <a:solidFill>
                   <a:srgbClr val="262626"/>
                 </a:solidFill>
-                <a:latin typeface="Apple SD Gothic Neo"/>
-                <a:ea typeface="Apple SD Gothic Neo"/>
-              </a:rPr>
-              <a:t>· 공식 심리지표(ESI)는 4월 55.7로 바닥을 찍고</a:t>
+                <a:latin typeface="NanumSquare Neo Regular" pitchFamily="2" charset="-127"/>
+                <a:ea typeface="NanumSquare Neo Regular" pitchFamily="2" charset="-127"/>
+              </a:rPr>
+              <a:t>  여름까지도 채 회복하지 못한 상태</a:t>
             </a:r>
           </a:p>
           <a:p>
@@ -4883,10 +4933,10 @@
                 <a:solidFill>
                   <a:srgbClr val="262626"/>
                 </a:solidFill>
-                <a:latin typeface="Apple SD Gothic Neo"/>
-                <a:ea typeface="Apple SD Gothic Neo"/>
-              </a:rPr>
-              <a:t>  여름까지도 채 회복하지 못한 상태</a:t>
+                <a:latin typeface="NanumSquare Neo Regular" pitchFamily="2" charset="-127"/>
+                <a:ea typeface="NanumSquare Neo Regular" pitchFamily="2" charset="-127"/>
+              </a:rPr>
+              <a:t>· 그런데 주식시장은 4월부터 넉 달 연속 강한 반등</a:t>
             </a:r>
           </a:p>
           <a:p>
@@ -4900,10 +4950,10 @@
                 <a:solidFill>
                   <a:srgbClr val="262626"/>
                 </a:solidFill>
-                <a:latin typeface="Apple SD Gothic Neo"/>
-                <a:ea typeface="Apple SD Gothic Neo"/>
-              </a:rPr>
-              <a:t>· 그런데 주식시장은 4월부터 넉 달 연속 강한 반등</a:t>
+                <a:latin typeface="NanumSquare Neo Regular" pitchFamily="2" charset="-127"/>
+                <a:ea typeface="NanumSquare Neo Regular" pitchFamily="2" charset="-127"/>
+              </a:rPr>
+              <a:t>  — 주가·환율은 발표를 기다릴 필요 없이 당일 확정</a:t>
             </a:r>
           </a:p>
           <a:p>
@@ -4912,15 +4962,80 @@
                 <a:spcPts val="200"/>
               </a:spcAft>
             </a:pPr>
+            <a:endParaRPr sz="1100" b="0">
+              <a:solidFill>
+                <a:srgbClr val="262626"/>
+              </a:solidFill>
+              <a:latin typeface="NanumSquare Neo Regular" pitchFamily="2" charset="-127"/>
+              <a:ea typeface="NanumSquare Neo Regular" pitchFamily="2" charset="-127"/>
+            </a:endParaRPr>
+          </a:p>
+          <a:p>
+            <a:pPr algn="l">
+              <a:spcAft>
+                <a:spcPts val="200"/>
+              </a:spcAft>
+            </a:pPr>
+            <a:r>
+              <a:rPr sz="1300" b="1">
+                <a:solidFill>
+                  <a:srgbClr val="243447"/>
+                </a:solidFill>
+                <a:latin typeface="NanumSquare Neo Regular" pitchFamily="2" charset="-127"/>
+                <a:ea typeface="NanumSquare Neo Regular" pitchFamily="2" charset="-127"/>
+              </a:rPr>
+              <a:t>발표 16주 전, 각자의 예측은</a:t>
+            </a:r>
+          </a:p>
+          <a:p>
+            <a:pPr algn="l">
+              <a:spcAft>
+                <a:spcPts val="200"/>
+              </a:spcAft>
+            </a:pPr>
+            <a:endParaRPr sz="1300" b="1">
+              <a:solidFill>
+                <a:srgbClr val="243447"/>
+              </a:solidFill>
+              <a:latin typeface="NanumSquare Neo Regular" pitchFamily="2" charset="-127"/>
+              <a:ea typeface="NanumSquare Neo Regular" pitchFamily="2" charset="-127"/>
+            </a:endParaRPr>
+          </a:p>
+          <a:p>
+            <a:pPr algn="l">
+              <a:spcAft>
+                <a:spcPts val="200"/>
+              </a:spcAft>
+            </a:pPr>
             <a:r>
               <a:rPr sz="1100" b="0">
                 <a:solidFill>
                   <a:srgbClr val="262626"/>
                 </a:solidFill>
-                <a:latin typeface="Apple SD Gothic Neo"/>
-                <a:ea typeface="Apple SD Gothic Neo"/>
-              </a:rPr>
-              <a:t>  — 주가·환율은 발표를 기다릴 필요 없이 당일 확정</a:t>
+                <a:latin typeface="NanumSquare Neo Regular" pitchFamily="2" charset="-127"/>
+                <a:ea typeface="NanumSquare Neo Regular" pitchFamily="2" charset="-127"/>
+              </a:rPr>
+              <a:t>· 원로(공식지표만): </a:t>
+            </a:r>
+            <a:r>
+              <a:rPr sz="1200" b="1">
+                <a:solidFill>
+                  <a:srgbClr val="B0532F"/>
+                </a:solidFill>
+                <a:latin typeface="NanumSquare Neo Regular" pitchFamily="2" charset="-127"/>
+                <a:ea typeface="NanumSquare Neo Regular" pitchFamily="2" charset="-127"/>
+              </a:rPr>
+              <a:t>-0.5%</a:t>
+            </a:r>
+            <a:r>
+              <a:rPr sz="1050" b="0">
+                <a:solidFill>
+                  <a:srgbClr val="6B6B6B"/>
+                </a:solidFill>
+                <a:latin typeface="NanumSquare Neo Regular" pitchFamily="2" charset="-127"/>
+                <a:ea typeface="NanumSquare Neo Regular" pitchFamily="2" charset="-127"/>
+              </a:rPr>
+              <a:t>  "아직 침체입니다"</a:t>
             </a:r>
           </a:p>
           <a:p>
@@ -4930,14 +5045,34 @@
               </a:spcAft>
             </a:pPr>
             <a:r>
-              <a:rPr sz="600" b="0">
+              <a:rPr sz="1100" b="0">
                 <a:solidFill>
                   <a:srgbClr val="262626"/>
                 </a:solidFill>
-                <a:latin typeface="Apple SD Gothic Neo"/>
-                <a:ea typeface="Apple SD Gothic Neo"/>
-              </a:rPr>
-              <a:t/>
+                <a:latin typeface="NanumSquare Neo Regular" pitchFamily="2" charset="-127"/>
+                <a:ea typeface="NanumSquare Neo Regular" pitchFamily="2" charset="-127"/>
+              </a:rPr>
+              <a:t>· 컨설턴트(시세판 포함): </a:t>
+            </a:r>
+            <a:r>
+              <a:rPr sz="1200" b="1">
+                <a:solidFill>
+                  <a:srgbClr val="1C5CAB"/>
+                </a:solidFill>
+                <a:latin typeface="NanumSquare Neo Regular" pitchFamily="2" charset="-127"/>
+                <a:ea typeface="NanumSquare Neo Regular" pitchFamily="2" charset="-127"/>
+              </a:rPr>
+              <a:t>-0.27%</a:t>
+            </a:r>
+            <a:r>
+              <a:rPr sz="1050" b="0">
+                <a:solidFill>
+                  <a:srgbClr val="6B6B6B"/>
+                </a:solidFill>
+                <a:latin typeface="NanumSquare Neo Regular" pitchFamily="2" charset="-127"/>
+                <a:ea typeface="NanumSquare Neo Regular" pitchFamily="2" charset="-127"/>
+              </a:rPr>
+              <a:t>  "반등 조짐이 보입니다"</a:t>
             </a:r>
           </a:p>
           <a:p>
@@ -4947,14 +5082,24 @@
               </a:spcAft>
             </a:pPr>
             <a:r>
+              <a:rPr sz="1100" b="0">
+                <a:solidFill>
+                  <a:srgbClr val="262626"/>
+                </a:solidFill>
+                <a:latin typeface="NanumSquare Neo Regular" pitchFamily="2" charset="-127"/>
+                <a:ea typeface="NanumSquare Neo Regular" pitchFamily="2" charset="-127"/>
+              </a:rPr>
+              <a:t>· 실제 속보치: </a:t>
+            </a:r>
+            <a:r>
               <a:rPr sz="1300" b="1">
                 <a:solidFill>
-                  <a:srgbClr val="243447"/>
-                </a:solidFill>
-                <a:latin typeface="Apple SD Gothic Neo"/>
-                <a:ea typeface="Apple SD Gothic Neo"/>
-              </a:rPr>
-              <a:t>발표 16주 전, 각자의 예측은</a:t>
+                  <a:srgbClr val="008A3E"/>
+                </a:solidFill>
+                <a:latin typeface="NanumSquare Neo Regular" pitchFamily="2" charset="-127"/>
+                <a:ea typeface="NanumSquare Neo Regular" pitchFamily="2" charset="-127"/>
+              </a:rPr>
+              <a:t>+1.9%</a:t>
             </a:r>
           </a:p>
           <a:p>
@@ -4963,15 +5108,29 @@
                 <a:spcPts val="200"/>
               </a:spcAft>
             </a:pPr>
-            <a:r>
-              <a:rPr sz="600" b="0">
+            <a:endParaRPr sz="1300" b="1">
+              <a:solidFill>
+                <a:srgbClr val="008A3E"/>
+              </a:solidFill>
+              <a:latin typeface="NanumSquare Neo Regular" pitchFamily="2" charset="-127"/>
+              <a:ea typeface="NanumSquare Neo Regular" pitchFamily="2" charset="-127"/>
+            </a:endParaRPr>
+          </a:p>
+          <a:p>
+            <a:pPr algn="l">
+              <a:spcAft>
+                <a:spcPts val="200"/>
+              </a:spcAft>
+            </a:pPr>
+            <a:r>
+              <a:rPr sz="1150" b="0">
                 <a:solidFill>
                   <a:srgbClr val="262626"/>
                 </a:solidFill>
-                <a:latin typeface="Apple SD Gothic Neo"/>
-                <a:ea typeface="Apple SD Gothic Neo"/>
-              </a:rPr>
-              <a:t/>
+                <a:latin typeface="NanumSquare Neo Regular" pitchFamily="2" charset="-127"/>
+                <a:ea typeface="NanumSquare Neo Regular" pitchFamily="2" charset="-127"/>
+              </a:rPr>
+              <a:t>모두 틀렸지만 — 시세판을 본 쪽이 덜 틀렸고,</a:t>
             </a:r>
           </a:p>
           <a:p>
@@ -4981,147 +5140,12 @@
               </a:spcAft>
             </a:pPr>
             <a:r>
-              <a:rPr sz="1100" b="0">
+              <a:rPr sz="1150" b="0">
                 <a:solidFill>
                   <a:srgbClr val="262626"/>
                 </a:solidFill>
-                <a:latin typeface="Apple SD Gothic Neo"/>
-                <a:ea typeface="Apple SD Gothic Neo"/>
-              </a:rPr>
-              <a:t>· 원로(공식지표만): </a:t>
-            </a:r>
-            <a:r>
-              <a:rPr sz="1200" b="1">
-                <a:solidFill>
-                  <a:srgbClr val="B0532F"/>
-                </a:solidFill>
-                <a:latin typeface="Apple SD Gothic Neo"/>
-                <a:ea typeface="Apple SD Gothic Neo"/>
-              </a:rPr>
-              <a:t>-0.5%</a:t>
-            </a:r>
-            <a:r>
-              <a:rPr sz="1050" b="0">
-                <a:solidFill>
-                  <a:srgbClr val="6B6B6B"/>
-                </a:solidFill>
-                <a:latin typeface="Apple SD Gothic Neo"/>
-                <a:ea typeface="Apple SD Gothic Neo"/>
-              </a:rPr>
-              <a:t>  "아직 침체입니다"</a:t>
-            </a:r>
-          </a:p>
-          <a:p>
-            <a:pPr algn="l">
-              <a:spcAft>
-                <a:spcPts val="200"/>
-              </a:spcAft>
-            </a:pPr>
-            <a:r>
-              <a:rPr sz="1100" b="0">
-                <a:solidFill>
-                  <a:srgbClr val="262626"/>
-                </a:solidFill>
-                <a:latin typeface="Apple SD Gothic Neo"/>
-                <a:ea typeface="Apple SD Gothic Neo"/>
-              </a:rPr>
-              <a:t>· 컨설턴트(시세판 포함): </a:t>
-            </a:r>
-            <a:r>
-              <a:rPr sz="1200" b="1">
-                <a:solidFill>
-                  <a:srgbClr val="1C5CAB"/>
-                </a:solidFill>
-                <a:latin typeface="Apple SD Gothic Neo"/>
-                <a:ea typeface="Apple SD Gothic Neo"/>
-              </a:rPr>
-              <a:t>-0.27%</a:t>
-            </a:r>
-            <a:r>
-              <a:rPr sz="1050" b="0">
-                <a:solidFill>
-                  <a:srgbClr val="6B6B6B"/>
-                </a:solidFill>
-                <a:latin typeface="Apple SD Gothic Neo"/>
-                <a:ea typeface="Apple SD Gothic Neo"/>
-              </a:rPr>
-              <a:t>  "반등 조짐이 보입니다"</a:t>
-            </a:r>
-          </a:p>
-          <a:p>
-            <a:pPr algn="l">
-              <a:spcAft>
-                <a:spcPts val="200"/>
-              </a:spcAft>
-            </a:pPr>
-            <a:r>
-              <a:rPr sz="1100" b="0">
-                <a:solidFill>
-                  <a:srgbClr val="262626"/>
-                </a:solidFill>
-                <a:latin typeface="Apple SD Gothic Neo"/>
-                <a:ea typeface="Apple SD Gothic Neo"/>
-              </a:rPr>
-              <a:t>· 실제 속보치: </a:t>
-            </a:r>
-            <a:r>
-              <a:rPr sz="1300" b="1">
-                <a:solidFill>
-                  <a:srgbClr val="008A3E"/>
-                </a:solidFill>
-                <a:latin typeface="Apple SD Gothic Neo"/>
-                <a:ea typeface="Apple SD Gothic Neo"/>
-              </a:rPr>
-              <a:t>+1.9%</a:t>
-            </a:r>
-          </a:p>
-          <a:p>
-            <a:pPr algn="l">
-              <a:spcAft>
-                <a:spcPts val="200"/>
-              </a:spcAft>
-            </a:pPr>
-            <a:r>
-              <a:rPr sz="600" b="0">
-                <a:solidFill>
-                  <a:srgbClr val="262626"/>
-                </a:solidFill>
-                <a:latin typeface="Apple SD Gothic Neo"/>
-                <a:ea typeface="Apple SD Gothic Neo"/>
-              </a:rPr>
-              <a:t/>
-            </a:r>
-          </a:p>
-          <a:p>
-            <a:pPr algn="l">
-              <a:spcAft>
-                <a:spcPts val="200"/>
-              </a:spcAft>
-            </a:pPr>
-            <a:r>
-              <a:rPr sz="1150" b="0">
-                <a:solidFill>
-                  <a:srgbClr val="262626"/>
-                </a:solidFill>
-                <a:latin typeface="Apple SD Gothic Neo"/>
-                <a:ea typeface="Apple SD Gothic Neo"/>
-              </a:rPr>
-              <a:t>모두 틀렸지만 — 시세판을 본 쪽이 덜 틀렸고,</a:t>
-            </a:r>
-          </a:p>
-          <a:p>
-            <a:pPr algn="l">
-              <a:spcAft>
-                <a:spcPts val="200"/>
-              </a:spcAft>
-            </a:pPr>
-            <a:r>
-              <a:rPr sz="1150" b="0">
-                <a:solidFill>
-                  <a:srgbClr val="262626"/>
-                </a:solidFill>
-                <a:latin typeface="Apple SD Gothic Neo"/>
-                <a:ea typeface="Apple SD Gothic Neo"/>
+                <a:latin typeface="NanumSquare Neo Regular" pitchFamily="2" charset="-127"/>
+                <a:ea typeface="NanumSquare Neo Regular" pitchFamily="2" charset="-127"/>
               </a:rPr>
               <a:t>발표가 가까워질수록 그 격차는 벌어졌습니다.</a:t>
             </a:r>
@@ -5195,6 +5219,10 @@
           <a:lstStyle/>
           <a:p>
             <a:pPr algn="ctr"/>
+            <a:endParaRPr>
+              <a:latin typeface="NanumSquare Neo Regular" pitchFamily="2" charset="-127"/>
+              <a:ea typeface="NanumSquare Neo Regular" pitchFamily="2" charset="-127"/>
+            </a:endParaRPr>
           </a:p>
         </p:txBody>
       </p:sp>
@@ -5206,8 +5234,8 @@
         </p:nvSpPr>
         <p:spPr>
           <a:xfrm>
-            <a:off x="685800" y="6318504"/>
-            <a:ext cx="10881360" cy="274320"/>
+            <a:off x="685800" y="6367947"/>
+            <a:ext cx="10881360" cy="175433"/>
           </a:xfrm>
           <a:prstGeom prst="rect">
             <a:avLst/>
@@ -5215,7 +5243,7 @@
           <a:noFill/>
         </p:spPr>
         <p:txBody>
-          <a:bodyPr wrap="square" anchor="ctr" lIns="45720" rIns="45720" tIns="18288" bIns="18288">
+          <a:bodyPr wrap="square" lIns="45720" tIns="18288" rIns="45720" bIns="18288" anchor="ctr">
             <a:spAutoFit/>
           </a:bodyPr>
           <a:lstStyle/>
@@ -5230,8 +5258,8 @@
                 <a:solidFill>
                   <a:srgbClr val="6B6B6B"/>
                 </a:solidFill>
-                <a:latin typeface="Apple SD Gothic Neo"/>
-                <a:ea typeface="Apple SD Gothic Neo"/>
+                <a:latin typeface="NanumSquare Neo Regular" pitchFamily="2" charset="-127"/>
+                <a:ea typeface="NanumSquare Neo Regular" pitchFamily="2" charset="-127"/>
               </a:rPr>
               <a:t>반등 분기 6개(2018Q1·2019Q2·2020Q3·2023Q1·2024Q3·2025Q2) 평균에서도 컨설턴트(0.581)가 원로(0.621)보다 정확 — 시세판 정보의 가치</a:t>
             </a:r>
@@ -5247,7 +5275,7 @@
 </file>
 
 <file path=ppt/slides/slide4.xml><?xml version="1.0" encoding="utf-8"?>
-<p:sld xmlns:a="http://schemas.openxmlformats.org/drawingml/2006/main" xmlns:p="http://schemas.openxmlformats.org/presentationml/2006/main" xmlns:r="http://schemas.openxmlformats.org/officeDocument/2006/relationships">
+<p:sld xmlns:a="http://schemas.openxmlformats.org/drawingml/2006/main" xmlns:r="http://schemas.openxmlformats.org/officeDocument/2006/relationships" xmlns:p="http://schemas.openxmlformats.org/presentationml/2006/main">
   <p:cSld>
     <p:spTree>
       <p:nvGrpSpPr>
@@ -5255,7 +5283,14 @@
         <p:cNvGrpSpPr/>
         <p:nvPr/>
       </p:nvGrpSpPr>
-      <p:grpSpPr/>
+      <p:grpSpPr>
+        <a:xfrm>
+          <a:off x="0" y="0"/>
+          <a:ext cx="0" cy="0"/>
+          <a:chOff x="0" y="0"/>
+          <a:chExt cx="0" cy="0"/>
+        </a:xfrm>
+      </p:grpSpPr>
       <p:sp>
         <p:nvSpPr>
           <p:cNvPr id="2" name="TextBox 1"/>
@@ -5265,7 +5300,7 @@
         <p:spPr>
           <a:xfrm>
             <a:off x="502920" y="274320"/>
-            <a:ext cx="11155680" cy="502920"/>
+            <a:ext cx="11155680" cy="344710"/>
           </a:xfrm>
           <a:prstGeom prst="rect">
             <a:avLst/>
@@ -5273,7 +5308,7 @@
           <a:noFill/>
         </p:spPr>
         <p:txBody>
-          <a:bodyPr wrap="square" anchor="t" lIns="45720" rIns="45720" tIns="18288" bIns="18288">
+          <a:bodyPr wrap="square" lIns="45720" tIns="18288" rIns="45720" bIns="18288" anchor="t">
             <a:spAutoFit/>
           </a:bodyPr>
           <a:lstStyle/>
@@ -5288,8 +5323,8 @@
                 <a:solidFill>
                   <a:srgbClr val="008A3E"/>
                 </a:solidFill>
-                <a:latin typeface="Apple SD Gothic Neo"/>
-                <a:ea typeface="Apple SD Gothic Neo"/>
+                <a:latin typeface="NanumSquare Neo Regular" pitchFamily="2" charset="-127"/>
+                <a:ea typeface="NanumSquare Neo Regular" pitchFamily="2" charset="-127"/>
               </a:rPr>
               <a:t>03  </a:t>
             </a:r>
@@ -5298,8 +5333,8 @@
                 <a:solidFill>
                   <a:srgbClr val="243447"/>
                 </a:solidFill>
-                <a:latin typeface="Apple SD Gothic Neo"/>
-                <a:ea typeface="Apple SD Gothic Neo"/>
+                <a:latin typeface="NanumSquare Neo Regular" pitchFamily="2" charset="-127"/>
+                <a:ea typeface="NanumSquare Neo Regular" pitchFamily="2" charset="-127"/>
               </a:rPr>
               <a:t>반전 — 원로와 컨설턴트, 둘만 섞었더니 오히려 나빠졌다</a:t>
             </a:r>
@@ -5374,7 +5409,7 @@
         <p:spPr>
           <a:xfrm>
             <a:off x="6400800" y="1234440"/>
-            <a:ext cx="5257800" cy="914400"/>
+            <a:ext cx="5257800" cy="447302"/>
           </a:xfrm>
           <a:prstGeom prst="rect">
             <a:avLst/>
@@ -5382,7 +5417,7 @@
           <a:noFill/>
         </p:spPr>
         <p:txBody>
-          <a:bodyPr wrap="square" anchor="t" lIns="45720" rIns="45720" tIns="18288" bIns="18288">
+          <a:bodyPr wrap="square" lIns="45720" tIns="18288" rIns="45720" bIns="18288" anchor="t">
             <a:spAutoFit/>
           </a:bodyPr>
           <a:lstStyle/>
@@ -5397,8 +5432,8 @@
                 <a:solidFill>
                   <a:srgbClr val="243447"/>
                 </a:solidFill>
-                <a:latin typeface="Apple SD Gothic Neo"/>
-                <a:ea typeface="Apple SD Gothic Neo"/>
+                <a:latin typeface="NanumSquare Neo Regular" pitchFamily="2" charset="-127"/>
+                <a:ea typeface="NanumSquare Neo Regular" pitchFamily="2" charset="-127"/>
               </a:rPr>
               <a:t>"좋은 둘을 평균하면 더 좋아지겠지?" — 아니었습니다</a:t>
             </a:r>
@@ -5414,8 +5449,8 @@
                 <a:solidFill>
                   <a:srgbClr val="262626"/>
                 </a:solidFill>
-                <a:latin typeface="Apple SD Gothic Neo"/>
-                <a:ea typeface="Apple SD Gothic Neo"/>
+                <a:latin typeface="NanumSquare Neo Regular" pitchFamily="2" charset="-127"/>
+                <a:ea typeface="NanumSquare Neo Regular" pitchFamily="2" charset="-127"/>
               </a:rPr>
               <a:t>두 사람 평균의 8년 성적: 0.808 → </a:t>
             </a:r>
@@ -5424,8 +5459,8 @@
                 <a:solidFill>
                   <a:srgbClr val="B0532F"/>
                 </a:solidFill>
-                <a:latin typeface="Apple SD Gothic Neo"/>
-                <a:ea typeface="Apple SD Gothic Neo"/>
+                <a:latin typeface="NanumSquare Neo Regular" pitchFamily="2" charset="-127"/>
+                <a:ea typeface="NanumSquare Neo Regular" pitchFamily="2" charset="-127"/>
               </a:rPr>
               <a:t>0.828 (후퇴)</a:t>
             </a:r>
@@ -5475,6 +5510,10 @@
           <a:lstStyle/>
           <a:p>
             <a:pPr algn="ctr"/>
+            <a:endParaRPr>
+              <a:latin typeface="NanumSquare Neo Regular" pitchFamily="2" charset="-127"/>
+              <a:ea typeface="NanumSquare Neo Regular" pitchFamily="2" charset="-127"/>
+            </a:endParaRPr>
           </a:p>
         </p:txBody>
       </p:sp>
@@ -5487,7 +5526,7 @@
         <p:spPr>
           <a:xfrm>
             <a:off x="6629400" y="2286000"/>
-            <a:ext cx="4846320" cy="1097280"/>
+            <a:ext cx="4846320" cy="814069"/>
           </a:xfrm>
           <a:prstGeom prst="rect">
             <a:avLst/>
@@ -5495,7 +5534,7 @@
           <a:noFill/>
         </p:spPr>
         <p:txBody>
-          <a:bodyPr wrap="square" anchor="t" lIns="45720" rIns="45720" tIns="18288" bIns="18288">
+          <a:bodyPr wrap="square" lIns="45720" tIns="18288" rIns="45720" bIns="18288" anchor="t">
             <a:spAutoFit/>
           </a:bodyPr>
           <a:lstStyle/>
@@ -5510,8 +5549,8 @@
                 <a:solidFill>
                   <a:srgbClr val="243447"/>
                 </a:solidFill>
-                <a:latin typeface="Apple SD Gothic Neo"/>
-                <a:ea typeface="Apple SD Gothic Neo"/>
+                <a:latin typeface="NanumSquare Neo Regular" pitchFamily="2" charset="-127"/>
+                <a:ea typeface="NanumSquare Neo Regular" pitchFamily="2" charset="-127"/>
               </a:rPr>
               <a:t>이유: 컨설턴트는 백지에서 시작하지 않는다</a:t>
             </a:r>
@@ -5527,8 +5566,8 @@
                 <a:solidFill>
                   <a:srgbClr val="262626"/>
                 </a:solidFill>
-                <a:latin typeface="Apple SD Gothic Neo"/>
-                <a:ea typeface="Apple SD Gothic Neo"/>
+                <a:latin typeface="NanumSquare Neo Regular" pitchFamily="2" charset="-127"/>
+                <a:ea typeface="NanumSquare Neo Regular" pitchFamily="2" charset="-127"/>
               </a:rPr>
               <a:t>컨설턴트가 받아보는 '과거 GDP 흐름' 자체가 원로가 만든</a:t>
             </a:r>
@@ -5544,8 +5583,8 @@
                 <a:solidFill>
                   <a:srgbClr val="262626"/>
                 </a:solidFill>
-                <a:latin typeface="Apple SD Gothic Neo"/>
-                <a:ea typeface="Apple SD Gothic Neo"/>
+                <a:latin typeface="NanumSquare Neo Regular" pitchFamily="2" charset="-127"/>
+                <a:ea typeface="NanumSquare Neo Regular" pitchFamily="2" charset="-127"/>
               </a:rPr>
               <a:t>월별 초안입니다. 즉 컨설턴트의 의견에는 이미 원로가</a:t>
             </a:r>
@@ -5561,8 +5600,8 @@
                 <a:solidFill>
                   <a:srgbClr val="262626"/>
                 </a:solidFill>
-                <a:latin typeface="Apple SD Gothic Neo"/>
-                <a:ea typeface="Apple SD Gothic Neo"/>
+                <a:latin typeface="NanumSquare Neo Regular" pitchFamily="2" charset="-127"/>
+                <a:ea typeface="NanumSquare Neo Regular" pitchFamily="2" charset="-127"/>
               </a:rPr>
               <a:t>절반쯤 들어있습니다.</a:t>
             </a:r>
@@ -5578,7 +5617,7 @@
         <p:spPr>
           <a:xfrm>
             <a:off x="6400800" y="3703320"/>
-            <a:ext cx="5257800" cy="2103120"/>
+            <a:ext cx="5257800" cy="1344984"/>
           </a:xfrm>
           <a:prstGeom prst="rect">
             <a:avLst/>
@@ -5586,7 +5625,7 @@
           <a:noFill/>
         </p:spPr>
         <p:txBody>
-          <a:bodyPr wrap="square" anchor="t" lIns="45720" rIns="45720" tIns="18288" bIns="18288">
+          <a:bodyPr wrap="square" lIns="45720" tIns="18288" rIns="45720" bIns="18288" anchor="t">
             <a:spAutoFit/>
           </a:bodyPr>
           <a:lstStyle/>
@@ -5601,8 +5640,8 @@
                 <a:solidFill>
                   <a:srgbClr val="262626"/>
                 </a:solidFill>
-                <a:latin typeface="Apple SD Gothic Neo"/>
-                <a:ea typeface="Apple SD Gothic Neo"/>
+                <a:latin typeface="NanumSquare Neo Regular" pitchFamily="2" charset="-127"/>
+                <a:ea typeface="NanumSquare Neo Regular" pitchFamily="2" charset="-127"/>
               </a:rPr>
               <a:t>그 상태에서 원로와 또 평균하면:</a:t>
             </a:r>
@@ -5613,15 +5652,39 @@
                 <a:spcPts val="200"/>
               </a:spcAft>
             </a:pPr>
-            <a:r>
-              <a:rPr sz="400" b="0">
+            <a:endParaRPr sz="1100" b="1">
+              <a:solidFill>
+                <a:srgbClr val="262626"/>
+              </a:solidFill>
+              <a:latin typeface="NanumSquare Neo Regular" pitchFamily="2" charset="-127"/>
+              <a:ea typeface="NanumSquare Neo Regular" pitchFamily="2" charset="-127"/>
+            </a:endParaRPr>
+          </a:p>
+          <a:p>
+            <a:pPr algn="l">
+              <a:spcAft>
+                <a:spcPts val="200"/>
+              </a:spcAft>
+            </a:pPr>
+            <a:r>
+              <a:rPr sz="1050" b="0">
                 <a:solidFill>
                   <a:srgbClr val="262626"/>
                 </a:solidFill>
-                <a:latin typeface="Apple SD Gothic Neo"/>
-                <a:ea typeface="Apple SD Gothic Neo"/>
-              </a:rPr>
-              <a:t/>
+                <a:latin typeface="NanumSquare Neo Regular" pitchFamily="2" charset="-127"/>
+                <a:ea typeface="NanumSquare Neo Regular" pitchFamily="2" charset="-127"/>
+              </a:rPr>
+              <a:t>· 사실상 </a:t>
+            </a:r>
+            <a:r>
+              <a:rPr sz="1050" b="1">
+                <a:solidFill>
+                  <a:srgbClr val="243447"/>
+                </a:solidFill>
+                <a:latin typeface="NanumSquare Neo Regular" pitchFamily="2" charset="-127"/>
+                <a:ea typeface="NanumSquare Neo Regular" pitchFamily="2" charset="-127"/>
+              </a:rPr>
+              <a:t>원로 의견 1.5표 + 시세판 정보 0.5표</a:t>
             </a:r>
           </a:p>
           <a:p>
@@ -5635,20 +5698,10 @@
                 <a:solidFill>
                   <a:srgbClr val="262626"/>
                 </a:solidFill>
-                <a:latin typeface="Apple SD Gothic Neo"/>
-                <a:ea typeface="Apple SD Gothic Neo"/>
-              </a:rPr>
-              <a:t>· 사실상 </a:t>
-            </a:r>
-            <a:r>
-              <a:rPr sz="1050" b="1">
-                <a:solidFill>
-                  <a:srgbClr val="243447"/>
-                </a:solidFill>
-                <a:latin typeface="Apple SD Gothic Neo"/>
-                <a:ea typeface="Apple SD Gothic Neo"/>
-              </a:rPr>
-              <a:t>원로 의견 1.5표 + 시세판 정보 0.5표</a:t>
+                <a:latin typeface="NanumSquare Neo Regular" pitchFamily="2" charset="-127"/>
+                <a:ea typeface="NanumSquare Neo Regular" pitchFamily="2" charset="-127"/>
+              </a:rPr>
+              <a:t>· 유일하게 새로웠던 시세판 정보가 희석되고,</a:t>
             </a:r>
           </a:p>
           <a:p>
@@ -5662,10 +5715,10 @@
                 <a:solidFill>
                   <a:srgbClr val="262626"/>
                 </a:solidFill>
-                <a:latin typeface="Apple SD Gothic Neo"/>
-                <a:ea typeface="Apple SD Gothic Neo"/>
-              </a:rPr>
-              <a:t>· 유일하게 새로웠던 시세판 정보가 희석되고,</a:t>
+                <a:latin typeface="NanumSquare Neo Regular" pitchFamily="2" charset="-127"/>
+                <a:ea typeface="NanumSquare Neo Regular" pitchFamily="2" charset="-127"/>
+              </a:rPr>
+              <a:t>· 원로가 틀린 구간에서는 그 오차까지 전염됩니다</a:t>
             </a:r>
           </a:p>
           <a:p>
@@ -5674,16 +5727,13 @@
                 <a:spcPts val="200"/>
               </a:spcAft>
             </a:pPr>
-            <a:r>
-              <a:rPr sz="1050" b="0">
-                <a:solidFill>
-                  <a:srgbClr val="262626"/>
-                </a:solidFill>
-                <a:latin typeface="Apple SD Gothic Neo"/>
-                <a:ea typeface="Apple SD Gothic Neo"/>
-              </a:rPr>
-              <a:t>· 원로가 틀린 구간에서는 그 오차까지 전염됩니다</a:t>
-            </a:r>
+            <a:endParaRPr sz="1050" b="0">
+              <a:solidFill>
+                <a:srgbClr val="262626"/>
+              </a:solidFill>
+              <a:latin typeface="NanumSquare Neo Regular" pitchFamily="2" charset="-127"/>
+              <a:ea typeface="NanumSquare Neo Regular" pitchFamily="2" charset="-127"/>
+            </a:endParaRPr>
           </a:p>
           <a:p>
             <a:pPr algn="l">
@@ -5692,29 +5742,12 @@
               </a:spcAft>
             </a:pPr>
             <a:r>
-              <a:rPr sz="400" b="0">
-                <a:solidFill>
-                  <a:srgbClr val="262626"/>
-                </a:solidFill>
-                <a:latin typeface="Apple SD Gothic Neo"/>
-                <a:ea typeface="Apple SD Gothic Neo"/>
-              </a:rPr>
-              <a:t/>
-            </a:r>
-          </a:p>
-          <a:p>
-            <a:pPr algn="l">
-              <a:spcAft>
-                <a:spcPts val="200"/>
-              </a:spcAft>
-            </a:pPr>
-            <a:r>
               <a:rPr sz="1100" b="1">
                 <a:solidFill>
                   <a:srgbClr val="B0532F"/>
                 </a:solidFill>
-                <a:latin typeface="Apple SD Gothic Neo"/>
-                <a:ea typeface="Apple SD Gothic Neo"/>
+                <a:latin typeface="NanumSquare Neo Regular" pitchFamily="2" charset="-127"/>
+                <a:ea typeface="NanumSquare Neo Regular" pitchFamily="2" charset="-127"/>
               </a:rPr>
               <a:t>→ 회의에서 같은 사람 말을 두 번 듣는 것과 같습니다.</a:t>
             </a:r>
@@ -5764,6 +5797,10 @@
           <a:lstStyle/>
           <a:p>
             <a:pPr algn="ctr"/>
+            <a:endParaRPr>
+              <a:latin typeface="NanumSquare Neo Regular" pitchFamily="2" charset="-127"/>
+              <a:ea typeface="NanumSquare Neo Regular" pitchFamily="2" charset="-127"/>
+            </a:endParaRPr>
           </a:p>
         </p:txBody>
       </p:sp>
@@ -5775,8 +5812,8 @@
         </p:nvSpPr>
         <p:spPr>
           <a:xfrm>
-            <a:off x="685800" y="6318504"/>
-            <a:ext cx="10881360" cy="274320"/>
+            <a:off x="685800" y="6367947"/>
+            <a:ext cx="10881360" cy="175433"/>
           </a:xfrm>
           <a:prstGeom prst="rect">
             <a:avLst/>
@@ -5784,7 +5821,7 @@
           <a:noFill/>
         </p:spPr>
         <p:txBody>
-          <a:bodyPr wrap="square" anchor="ctr" lIns="45720" rIns="45720" tIns="18288" bIns="18288">
+          <a:bodyPr wrap="square" lIns="45720" tIns="18288" rIns="45720" bIns="18288" anchor="ctr">
             <a:spAutoFit/>
           </a:bodyPr>
           <a:lstStyle/>
@@ -5799,8 +5836,8 @@
                 <a:solidFill>
                   <a:srgbClr val="6B6B6B"/>
                 </a:solidFill>
-                <a:latin typeface="Apple SD Gothic Neo"/>
-                <a:ea typeface="Apple SD Gothic Neo"/>
+                <a:latin typeface="NanumSquare Neo Regular" pitchFamily="2" charset="-127"/>
+                <a:ea typeface="NanumSquare Neo Regular" pitchFamily="2" charset="-127"/>
               </a:rPr>
               <a:t>원로 단독+컨설턴트 50:50 평균 = 0.828 (컨설턴트 단독 0.808보다 열세) — 정보 중복과 오차 전염이 원인</a:t>
             </a:r>
@@ -5816,7 +5853,7 @@
 </file>
 
 <file path=ppt/slides/slide5.xml><?xml version="1.0" encoding="utf-8"?>
-<p:sld xmlns:a="http://schemas.openxmlformats.org/drawingml/2006/main" xmlns:p="http://schemas.openxmlformats.org/presentationml/2006/main" xmlns:r="http://schemas.openxmlformats.org/officeDocument/2006/relationships">
+<p:sld xmlns:a="http://schemas.openxmlformats.org/drawingml/2006/main" xmlns:r="http://schemas.openxmlformats.org/officeDocument/2006/relationships" xmlns:p="http://schemas.openxmlformats.org/presentationml/2006/main">
   <p:cSld>
     <p:spTree>
       <p:nvGrpSpPr>
@@ -5824,7 +5861,14 @@
         <p:cNvGrpSpPr/>
         <p:nvPr/>
       </p:nvGrpSpPr>
-      <p:grpSpPr/>
+      <p:grpSpPr>
+        <a:xfrm>
+          <a:off x="0" y="0"/>
+          <a:ext cx="0" cy="0"/>
+          <a:chOff x="0" y="0"/>
+          <a:chExt cx="0" cy="0"/>
+        </a:xfrm>
+      </p:grpSpPr>
       <p:sp>
         <p:nvSpPr>
           <p:cNvPr id="2" name="TextBox 1"/>
@@ -5834,7 +5878,7 @@
         <p:spPr>
           <a:xfrm>
             <a:off x="502920" y="274320"/>
-            <a:ext cx="11155680" cy="502920"/>
+            <a:ext cx="11155680" cy="344710"/>
           </a:xfrm>
           <a:prstGeom prst="rect">
             <a:avLst/>
@@ -5842,7 +5886,7 @@
           <a:noFill/>
         </p:spPr>
         <p:txBody>
-          <a:bodyPr wrap="square" anchor="t" lIns="45720" rIns="45720" tIns="18288" bIns="18288">
+          <a:bodyPr wrap="square" lIns="45720" tIns="18288" rIns="45720" bIns="18288" anchor="t">
             <a:spAutoFit/>
           </a:bodyPr>
           <a:lstStyle/>
@@ -5857,8 +5901,8 @@
                 <a:solidFill>
                   <a:srgbClr val="008A3E"/>
                 </a:solidFill>
-                <a:latin typeface="Apple SD Gothic Neo"/>
-                <a:ea typeface="Apple SD Gothic Neo"/>
+                <a:latin typeface="NanumSquare Neo Regular" pitchFamily="2" charset="-127"/>
+                <a:ea typeface="NanumSquare Neo Regular" pitchFamily="2" charset="-127"/>
               </a:rPr>
               <a:t>04  </a:t>
             </a:r>
@@ -5867,8 +5911,8 @@
                 <a:solidFill>
                   <a:srgbClr val="243447"/>
                 </a:solidFill>
-                <a:latin typeface="Apple SD Gothic Neo"/>
-                <a:ea typeface="Apple SD Gothic Neo"/>
+                <a:latin typeface="NanumSquare Neo Regular" pitchFamily="2" charset="-127"/>
+                <a:ea typeface="NanumSquare Neo Regular" pitchFamily="2" charset="-127"/>
               </a:rPr>
               <a:t>결말 — 세 명이 각자 한 표씩, '균등 위원회'</a:t>
             </a:r>
@@ -5943,7 +5987,7 @@
         <p:spPr>
           <a:xfrm>
             <a:off x="6903720" y="1234440"/>
-            <a:ext cx="4754880" cy="2377440"/>
+            <a:ext cx="4754880" cy="1409104"/>
           </a:xfrm>
           <a:prstGeom prst="rect">
             <a:avLst/>
@@ -5951,7 +5995,7 @@
           <a:noFill/>
         </p:spPr>
         <p:txBody>
-          <a:bodyPr wrap="square" anchor="t" lIns="45720" rIns="45720" tIns="18288" bIns="18288">
+          <a:bodyPr wrap="square" lIns="45720" tIns="18288" rIns="45720" bIns="18288" anchor="t">
             <a:spAutoFit/>
           </a:bodyPr>
           <a:lstStyle/>
@@ -5966,8 +6010,8 @@
                 <a:solidFill>
                   <a:srgbClr val="243447"/>
                 </a:solidFill>
-                <a:latin typeface="Apple SD Gothic Neo"/>
-                <a:ea typeface="Apple SD Gothic Neo"/>
+                <a:latin typeface="NanumSquare Neo Regular" pitchFamily="2" charset="-127"/>
+                <a:ea typeface="NanumSquare Neo Regular" pitchFamily="2" charset="-127"/>
               </a:rPr>
               <a:t>(원로 + 조수 + 컨설턴트) ÷ 3 = </a:t>
             </a:r>
@@ -5976,8 +6020,8 @@
                 <a:solidFill>
                   <a:srgbClr val="008A3E"/>
                 </a:solidFill>
-                <a:latin typeface="Apple SD Gothic Neo"/>
-                <a:ea typeface="Apple SD Gothic Neo"/>
+                <a:latin typeface="NanumSquare Neo Regular" pitchFamily="2" charset="-127"/>
+                <a:ea typeface="NanumSquare Neo Regular" pitchFamily="2" charset="-127"/>
               </a:rPr>
               <a:t>0.746</a:t>
             </a:r>
@@ -5988,15 +6032,49 @@
                 <a:spcPts val="400"/>
               </a:spcAft>
             </a:pPr>
-            <a:r>
-              <a:rPr sz="400" b="0">
+            <a:endParaRPr sz="1400" b="1">
+              <a:solidFill>
+                <a:srgbClr val="008A3E"/>
+              </a:solidFill>
+              <a:latin typeface="NanumSquare Neo Regular" pitchFamily="2" charset="-127"/>
+              <a:ea typeface="NanumSquare Neo Regular" pitchFamily="2" charset="-127"/>
+            </a:endParaRPr>
+          </a:p>
+          <a:p>
+            <a:pPr algn="l">
+              <a:spcAft>
+                <a:spcPts val="400"/>
+              </a:spcAft>
+            </a:pPr>
+            <a:r>
+              <a:rPr sz="1100" b="0">
                 <a:solidFill>
                   <a:srgbClr val="262626"/>
                 </a:solidFill>
-                <a:latin typeface="Apple SD Gothic Neo"/>
-                <a:ea typeface="Apple SD Gothic Neo"/>
-              </a:rPr>
-              <a:t/>
+                <a:latin typeface="NanumSquare Neo Regular" pitchFamily="2" charset="-127"/>
+                <a:ea typeface="NanumSquare Neo Regular" pitchFamily="2" charset="-127"/>
+              </a:rPr>
+              <a:t>· 현행 최고(0.765) 대비 </a:t>
+            </a:r>
+            <a:r>
+              <a:rPr sz="1150" b="1">
+                <a:solidFill>
+                  <a:srgbClr val="008A3E"/>
+                </a:solidFill>
+                <a:latin typeface="NanumSquare Neo Regular" pitchFamily="2" charset="-127"/>
+                <a:ea typeface="NanumSquare Neo Regular" pitchFamily="2" charset="-127"/>
+              </a:rPr>
+              <a:t>-2.5%</a:t>
+            </a:r>
+            <a:r>
+              <a:rPr sz="1100" b="0">
+                <a:solidFill>
+                  <a:srgbClr val="262626"/>
+                </a:solidFill>
+                <a:latin typeface="NanumSquare Neo Regular" pitchFamily="2" charset="-127"/>
+                <a:ea typeface="NanumSquare Neo Regular" pitchFamily="2" charset="-127"/>
+              </a:rPr>
+              <a:t> — 국면 판단 없이 달성</a:t>
             </a:r>
           </a:p>
           <a:p>
@@ -6010,30 +6088,67 @@
                 <a:solidFill>
                   <a:srgbClr val="262626"/>
                 </a:solidFill>
-                <a:latin typeface="Apple SD Gothic Neo"/>
-                <a:ea typeface="Apple SD Gothic Neo"/>
-              </a:rPr>
-              <a:t>· 현행 최고(0.765) 대비 </a:t>
-            </a:r>
-            <a:r>
-              <a:rPr sz="1150" b="1">
-                <a:solidFill>
-                  <a:srgbClr val="008A3E"/>
-                </a:solidFill>
-                <a:latin typeface="Apple SD Gothic Neo"/>
-                <a:ea typeface="Apple SD Gothic Neo"/>
-              </a:rPr>
-              <a:t>-2.5%</a:t>
-            </a:r>
+                <a:latin typeface="NanumSquare Neo Regular" pitchFamily="2" charset="-127"/>
+                <a:ea typeface="NanumSquare Neo Regular" pitchFamily="2" charset="-127"/>
+              </a:rPr>
+              <a:t>· 32개 분기 중 </a:t>
+            </a:r>
+            <a:r>
+              <a:rPr sz="1100" b="1">
+                <a:solidFill>
+                  <a:srgbClr val="262626"/>
+                </a:solidFill>
+                <a:latin typeface="NanumSquare Neo Regular" pitchFamily="2" charset="-127"/>
+                <a:ea typeface="NanumSquare Neo Regular" pitchFamily="2" charset="-127"/>
+              </a:rPr>
+              <a:t>20개 분기에서 개선</a:t>
+            </a:r>
+            <a:r>
+              <a:rPr sz="1000" b="0">
+                <a:solidFill>
+                  <a:srgbClr val="6B6B6B"/>
+                </a:solidFill>
+                <a:latin typeface="NanumSquare Neo Regular" pitchFamily="2" charset="-127"/>
+                <a:ea typeface="NanumSquare Neo Regular" pitchFamily="2" charset="-127"/>
+              </a:rPr>
+              <a:t> (코로나 시기 제외에도 유효)</a:t>
+            </a:r>
+          </a:p>
+          <a:p>
+            <a:pPr algn="l">
+              <a:spcAft>
+                <a:spcPts val="400"/>
+              </a:spcAft>
+            </a:pPr>
             <a:r>
               <a:rPr sz="1100" b="0">
                 <a:solidFill>
                   <a:srgbClr val="262626"/>
                 </a:solidFill>
-                <a:latin typeface="Apple SD Gothic Neo"/>
-                <a:ea typeface="Apple SD Gothic Neo"/>
-              </a:rPr>
-              <a:t> — 국면 판단 없이 달성</a:t>
+                <a:latin typeface="NanumSquare Neo Regular" pitchFamily="2" charset="-127"/>
+                <a:ea typeface="NanumSquare Neo Regular" pitchFamily="2" charset="-127"/>
+              </a:rPr>
+              <a:t>· 반등 분기 오차 0.815 → </a:t>
+            </a:r>
+            <a:r>
+              <a:rPr sz="1100" b="1">
+                <a:solidFill>
+                  <a:srgbClr val="262626"/>
+                </a:solidFill>
+                <a:latin typeface="NanumSquare Neo Regular" pitchFamily="2" charset="-127"/>
+                <a:ea typeface="NanumSquare Neo Regular" pitchFamily="2" charset="-127"/>
+              </a:rPr>
+              <a:t>0.715</a:t>
+            </a:r>
+            <a:r>
+              <a:rPr sz="1000" b="0">
+                <a:solidFill>
+                  <a:srgbClr val="6B6B6B"/>
+                </a:solidFill>
+                <a:latin typeface="NanumSquare Neo Regular" pitchFamily="2" charset="-127"/>
+                <a:ea typeface="NanumSquare Neo Regular" pitchFamily="2" charset="-127"/>
+              </a:rPr>
+              <a:t> — 시세판 정보가 제몫</a:t>
             </a:r>
           </a:p>
           <a:p>
@@ -6047,82 +6162,8 @@
                 <a:solidFill>
                   <a:srgbClr val="262626"/>
                 </a:solidFill>
-                <a:latin typeface="Apple SD Gothic Neo"/>
-                <a:ea typeface="Apple SD Gothic Neo"/>
-              </a:rPr>
-              <a:t>· 32개 분기 중 </a:t>
-            </a:r>
-            <a:r>
-              <a:rPr sz="1100" b="1">
-                <a:solidFill>
-                  <a:srgbClr val="262626"/>
-                </a:solidFill>
-                <a:latin typeface="Apple SD Gothic Neo"/>
-                <a:ea typeface="Apple SD Gothic Neo"/>
-              </a:rPr>
-              <a:t>20개 분기에서 개선</a:t>
-            </a:r>
-            <a:r>
-              <a:rPr sz="1000" b="0">
-                <a:solidFill>
-                  <a:srgbClr val="6B6B6B"/>
-                </a:solidFill>
-                <a:latin typeface="Apple SD Gothic Neo"/>
-                <a:ea typeface="Apple SD Gothic Neo"/>
-              </a:rPr>
-              <a:t> (코로나 시기 제외에도 유효)</a:t>
-            </a:r>
-          </a:p>
-          <a:p>
-            <a:pPr algn="l">
-              <a:spcAft>
-                <a:spcPts val="400"/>
-              </a:spcAft>
-            </a:pPr>
-            <a:r>
-              <a:rPr sz="1100" b="0">
-                <a:solidFill>
-                  <a:srgbClr val="262626"/>
-                </a:solidFill>
-                <a:latin typeface="Apple SD Gothic Neo"/>
-                <a:ea typeface="Apple SD Gothic Neo"/>
-              </a:rPr>
-              <a:t>· 반등 분기 오차 0.815 → </a:t>
-            </a:r>
-            <a:r>
-              <a:rPr sz="1100" b="1">
-                <a:solidFill>
-                  <a:srgbClr val="262626"/>
-                </a:solidFill>
-                <a:latin typeface="Apple SD Gothic Neo"/>
-                <a:ea typeface="Apple SD Gothic Neo"/>
-              </a:rPr>
-              <a:t>0.715</a:t>
-            </a:r>
-            <a:r>
-              <a:rPr sz="1000" b="0">
-                <a:solidFill>
-                  <a:srgbClr val="6B6B6B"/>
-                </a:solidFill>
-                <a:latin typeface="Apple SD Gothic Neo"/>
-                <a:ea typeface="Apple SD Gothic Neo"/>
-              </a:rPr>
-              <a:t> — 시세판 정보가 제몫</a:t>
-            </a:r>
-          </a:p>
-          <a:p>
-            <a:pPr algn="l">
-              <a:spcAft>
-                <a:spcPts val="400"/>
-              </a:spcAft>
-            </a:pPr>
-            <a:r>
-              <a:rPr sz="1100" b="0">
-                <a:solidFill>
-                  <a:srgbClr val="262626"/>
-                </a:solidFill>
-                <a:latin typeface="Apple SD Gothic Neo"/>
-                <a:ea typeface="Apple SD Gothic Neo"/>
+                <a:latin typeface="NanumSquare Neo Regular" pitchFamily="2" charset="-127"/>
+                <a:ea typeface="NanumSquare Neo Regular" pitchFamily="2" charset="-127"/>
               </a:rPr>
               <a:t>· 가중치 튜닝 없음 — 단순 균등 1표씩이 최적</a:t>
             </a:r>
@@ -6172,6 +6213,10 @@
           <a:lstStyle/>
           <a:p>
             <a:pPr algn="ctr"/>
+            <a:endParaRPr>
+              <a:latin typeface="NanumSquare Neo Regular" pitchFamily="2" charset="-127"/>
+              <a:ea typeface="NanumSquare Neo Regular" pitchFamily="2" charset="-127"/>
+            </a:endParaRPr>
           </a:p>
         </p:txBody>
       </p:sp>
@@ -6184,7 +6229,7 @@
         <p:spPr>
           <a:xfrm>
             <a:off x="7104888" y="3840480"/>
-            <a:ext cx="4389120" cy="1051560"/>
+            <a:ext cx="4389120" cy="814069"/>
           </a:xfrm>
           <a:prstGeom prst="rect">
             <a:avLst/>
@@ -6192,7 +6237,7 @@
           <a:noFill/>
         </p:spPr>
         <p:txBody>
-          <a:bodyPr wrap="square" anchor="t" lIns="45720" rIns="45720" tIns="18288" bIns="18288">
+          <a:bodyPr wrap="square" lIns="45720" tIns="18288" rIns="45720" bIns="18288" anchor="t">
             <a:spAutoFit/>
           </a:bodyPr>
           <a:lstStyle/>
@@ -6207,8 +6252,8 @@
                 <a:solidFill>
                   <a:srgbClr val="008A3E"/>
                 </a:solidFill>
-                <a:latin typeface="Apple SD Gothic Neo"/>
-                <a:ea typeface="Apple SD Gothic Neo"/>
+                <a:latin typeface="NanumSquare Neo Regular" pitchFamily="2" charset="-127"/>
+                <a:ea typeface="NanumSquare Neo Regular" pitchFamily="2" charset="-127"/>
               </a:rPr>
               <a:t>왜 위원회는 이기는가</a:t>
             </a:r>
@@ -6224,8 +6269,8 @@
                 <a:solidFill>
                   <a:srgbClr val="262626"/>
                 </a:solidFill>
-                <a:latin typeface="Apple SD Gothic Neo"/>
-                <a:ea typeface="Apple SD Gothic Neo"/>
+                <a:latin typeface="NanumSquare Neo Regular" pitchFamily="2" charset="-127"/>
+                <a:ea typeface="NanumSquare Neo Regular" pitchFamily="2" charset="-127"/>
               </a:rPr>
               <a:t>세 사람은 서로 다른 순간에, 서로 다른 방향으로 틀립니다.</a:t>
             </a:r>
@@ -6241,8 +6286,8 @@
                 <a:solidFill>
                   <a:srgbClr val="262626"/>
                 </a:solidFill>
-                <a:latin typeface="Apple SD Gothic Neo"/>
-                <a:ea typeface="Apple SD Gothic Neo"/>
+                <a:latin typeface="NanumSquare Neo Regular" pitchFamily="2" charset="-127"/>
+                <a:ea typeface="NanumSquare Neo Regular" pitchFamily="2" charset="-127"/>
               </a:rPr>
               <a:t>조수가 혼자 비관할 때 컨설턴트가 되돌리고, 컨설턴트가</a:t>
             </a:r>
@@ -6258,8 +6303,8 @@
                 <a:solidFill>
                   <a:srgbClr val="262626"/>
                 </a:solidFill>
-                <a:latin typeface="Apple SD Gothic Neo"/>
-                <a:ea typeface="Apple SD Gothic Neo"/>
+                <a:latin typeface="NanumSquare Neo Regular" pitchFamily="2" charset="-127"/>
+                <a:ea typeface="NanumSquare Neo Regular" pitchFamily="2" charset="-127"/>
               </a:rPr>
               <a:t>평온기에 흔들릴 때 원로+조수가 잡아줍니다.</a:t>
             </a:r>
@@ -6275,7 +6320,7 @@
         <p:spPr>
           <a:xfrm>
             <a:off x="6903720" y="5120640"/>
-            <a:ext cx="4754880" cy="822960"/>
+            <a:ext cx="4754880" cy="354969"/>
           </a:xfrm>
           <a:prstGeom prst="rect">
             <a:avLst/>
@@ -6283,7 +6328,7 @@
           <a:noFill/>
         </p:spPr>
         <p:txBody>
-          <a:bodyPr wrap="square" anchor="t" lIns="45720" rIns="45720" tIns="18288" bIns="18288">
+          <a:bodyPr wrap="square" lIns="45720" tIns="18288" rIns="45720" bIns="18288" anchor="t">
             <a:spAutoFit/>
           </a:bodyPr>
           <a:lstStyle/>
@@ -6298,8 +6343,8 @@
                 <a:solidFill>
                   <a:srgbClr val="6B6B6B"/>
                 </a:solidFill>
-                <a:latin typeface="Apple SD Gothic Neo"/>
-                <a:ea typeface="Apple SD Gothic Neo"/>
+                <a:latin typeface="NanumSquare Neo Regular" pitchFamily="2" charset="-127"/>
+                <a:ea typeface="NanumSquare Neo Regular" pitchFamily="2" charset="-127"/>
               </a:rPr>
               <a:t>유의사항: 개선폭 2.5%는 32분기 표본으로는 통계적 유의성 미달</a:t>
             </a:r>
@@ -6315,8 +6360,8 @@
                 <a:solidFill>
                   <a:srgbClr val="6B6B6B"/>
                 </a:solidFill>
-                <a:latin typeface="Apple SD Gothic Neo"/>
-                <a:ea typeface="Apple SD Gothic Neo"/>
+                <a:latin typeface="NanumSquare Neo Regular" pitchFamily="2" charset="-127"/>
+                <a:ea typeface="NanumSquare Neo Regular" pitchFamily="2" charset="-127"/>
               </a:rPr>
               <a:t>(p=0.37) — 보고 수위는 "기존 대비 비열등 + 개선 방향"이 정직합니다.</a:t>
             </a:r>
@@ -6366,6 +6411,10 @@
           <a:lstStyle/>
           <a:p>
             <a:pPr algn="ctr"/>
+            <a:endParaRPr>
+              <a:latin typeface="NanumSquare Neo Regular" pitchFamily="2" charset="-127"/>
+              <a:ea typeface="NanumSquare Neo Regular" pitchFamily="2" charset="-127"/>
+            </a:endParaRPr>
           </a:p>
         </p:txBody>
       </p:sp>
@@ -6377,8 +6426,8 @@
         </p:nvSpPr>
         <p:spPr>
           <a:xfrm>
-            <a:off x="685800" y="6318504"/>
-            <a:ext cx="10881360" cy="274320"/>
+            <a:off x="685800" y="6367947"/>
+            <a:ext cx="10881360" cy="175433"/>
           </a:xfrm>
           <a:prstGeom prst="rect">
             <a:avLst/>
@@ -6386,7 +6435,7 @@
           <a:noFill/>
         </p:spPr>
         <p:txBody>
-          <a:bodyPr wrap="square" anchor="ctr" lIns="45720" rIns="45720" tIns="18288" bIns="18288">
+          <a:bodyPr wrap="square" lIns="45720" tIns="18288" rIns="45720" bIns="18288" anchor="ctr">
             <a:spAutoFit/>
           </a:bodyPr>
           <a:lstStyle/>
@@ -6401,8 +6450,8 @@
                 <a:solidFill>
                   <a:srgbClr val="6B6B6B"/>
                 </a:solidFill>
-                <a:latin typeface="Apple SD Gothic Neo"/>
-                <a:ea typeface="Apple SD Gothic Neo"/>
+                <a:latin typeface="NanumSquare Neo Regular" pitchFamily="2" charset="-127"/>
+                <a:ea typeface="NanumSquare Neo Regular" pitchFamily="2" charset="-127"/>
               </a:rPr>
               <a:t>다음 갈림길: 이 결과는 '중심선 교체' 옵션 — 예측 불변이 전제인 fan chart 제안과 별개 트랙으로, 한은 수용성에 따라 선택 제시 가능</a:t>
             </a:r>
